--- a/建設業基幹システム_カスタマイズ多発ポイント_勉強会資料.pptx
+++ b/建設業基幹システム_カスタマイズ多発ポイント_勉強会資料.pptx
@@ -6,25 +6,25 @@
   </p:sldMasterIdLst>
   <p:sldIdLst>
     <p:sldId id="256" r:id="rId7"/>
-    <p:sldId id="257" r:id="rId8"/>
-    <p:sldId id="258" r:id="rId9"/>
-    <p:sldId id="259" r:id="rId10"/>
-    <p:sldId id="260" r:id="rId11"/>
-    <p:sldId id="261" r:id="rId12"/>
-    <p:sldId id="262" r:id="rId13"/>
-    <p:sldId id="263" r:id="rId14"/>
-    <p:sldId id="264" r:id="rId15"/>
-    <p:sldId id="265" r:id="rId16"/>
-    <p:sldId id="266" r:id="rId17"/>
-    <p:sldId id="267" r:id="rId18"/>
-    <p:sldId id="268" r:id="rId19"/>
-    <p:sldId id="269" r:id="rId20"/>
-    <p:sldId id="270" r:id="rId21"/>
-    <p:sldId id="271" r:id="rId22"/>
-    <p:sldId id="272" r:id="rId23"/>
-    <p:sldId id="273" r:id="rId24"/>
-    <p:sldId id="274" r:id="rId25"/>
-    <p:sldId id="275" r:id="rId26"/>
+    <p:sldId id="257" r:id="rId9"/>
+    <p:sldId id="258" r:id="rId10"/>
+    <p:sldId id="259" r:id="rId11"/>
+    <p:sldId id="260" r:id="rId12"/>
+    <p:sldId id="261" r:id="rId13"/>
+    <p:sldId id="262" r:id="rId14"/>
+    <p:sldId id="263" r:id="rId15"/>
+    <p:sldId id="264" r:id="rId16"/>
+    <p:sldId id="265" r:id="rId17"/>
+    <p:sldId id="266" r:id="rId18"/>
+    <p:sldId id="267" r:id="rId19"/>
+    <p:sldId id="268" r:id="rId20"/>
+    <p:sldId id="269" r:id="rId21"/>
+    <p:sldId id="270" r:id="rId22"/>
+    <p:sldId id="271" r:id="rId23"/>
+    <p:sldId id="272" r:id="rId24"/>
+    <p:sldId id="273" r:id="rId25"/>
+    <p:sldId id="274" r:id="rId26"/>
+    <p:sldId id="275" r:id="rId27"/>
   </p:sldIdLst>
   <p:sldSz cx="9144000" cy="5143500" type="screen4x3"/>
   <p:notesSz cx="6858000" cy="9144000"/>
@@ -124,6 +124,2321 @@
     </a:lvl9pPr>
   </p:defaultTextStyle>
 </p:presentation>
+</file>
+
+<file path=ppt/notesMasters/notesMaster1.xml><?xml version="1.0" encoding="utf-8"?>
+<p:notesMaster xmlns:a="http://schemas.openxmlformats.org/drawingml/2006/main" xmlns:p="http://schemas.openxmlformats.org/presentationml/2006/main" xmlns:r="http://schemas.openxmlformats.org/officeDocument/2006/relationships">
+  <p:cSld>
+    <p:bg>
+      <p:bgRef idx="1001">
+        <a:schemeClr val="bg1"/>
+      </p:bgRef>
+    </p:bg>
+    <p:spTree>
+      <p:nvGrpSpPr>
+        <p:cNvPr id="1" name=""/>
+        <p:cNvGrpSpPr/>
+        <p:nvPr/>
+      </p:nvGrpSpPr>
+      <p:grpSpPr>
+        <a:xfrm>
+          <a:off x="0" y="0"/>
+          <a:ext cx="0" cy="0"/>
+          <a:chOff x="0" y="0"/>
+          <a:chExt cx="0" cy="0"/>
+        </a:xfrm>
+      </p:grpSpPr>
+      <p:sp>
+        <p:nvSpPr>
+          <p:cNvPr id="2" name="Header Placeholder 1"/>
+          <p:cNvSpPr>
+            <a:spLocks noGrp="1"/>
+          </p:cNvSpPr>
+          <p:nvPr>
+            <p:ph type="hdr" sz="quarter"/>
+          </p:nvPr>
+        </p:nvSpPr>
+        <p:spPr>
+          <a:xfrm>
+            <a:off x="0" y="0"/>
+            <a:ext cx="2971800" cy="457200"/>
+          </a:xfrm>
+          <a:prstGeom prst="rect">
+            <a:avLst/>
+          </a:prstGeom>
+        </p:spPr>
+        <p:txBody>
+          <a:bodyPr vert="horz" lIns="91440" tIns="45720" rIns="91440" bIns="45720" rtlCol="0"/>
+          <a:lstStyle>
+            <a:lvl1pPr algn="l">
+              <a:defRPr sz="1200"/>
+            </a:lvl1pPr>
+          </a:lstStyle>
+          <a:p>
+            <a:endParaRPr lang="en-US"/>
+          </a:p>
+        </p:txBody>
+      </p:sp>
+      <p:sp>
+        <p:nvSpPr>
+          <p:cNvPr id="3" name="Date Placeholder 2"/>
+          <p:cNvSpPr>
+            <a:spLocks noGrp="1"/>
+          </p:cNvSpPr>
+          <p:nvPr>
+            <p:ph type="dt" idx="1"/>
+          </p:nvPr>
+        </p:nvSpPr>
+        <p:spPr>
+          <a:xfrm>
+            <a:off x="3884613" y="0"/>
+            <a:ext cx="2971800" cy="457200"/>
+          </a:xfrm>
+          <a:prstGeom prst="rect">
+            <a:avLst/>
+          </a:prstGeom>
+        </p:spPr>
+        <p:txBody>
+          <a:bodyPr vert="horz" lIns="91440" tIns="45720" rIns="91440" bIns="45720" rtlCol="0"/>
+          <a:lstStyle>
+            <a:lvl1pPr algn="r">
+              <a:defRPr sz="1200"/>
+            </a:lvl1pPr>
+          </a:lstStyle>
+          <a:p>
+            <a:fld id="{0F89C1C7-3DCD-1040-A9CF-14679D8B5DDD}" type="datetimeFigureOut">
+              <a:rPr lang="en-US" smtClean="0"/>
+              <a:t>10/17/16</a:t>
+            </a:fld>
+            <a:endParaRPr lang="en-US"/>
+          </a:p>
+        </p:txBody>
+      </p:sp>
+      <p:sp>
+        <p:nvSpPr>
+          <p:cNvPr id="4" name="Slide Image Placeholder 3"/>
+          <p:cNvSpPr>
+            <a:spLocks noGrp="1" noRot="1" noChangeAspect="1"/>
+          </p:cNvSpPr>
+          <p:nvPr>
+            <p:ph type="sldImg" idx="2"/>
+          </p:nvPr>
+        </p:nvSpPr>
+        <p:spPr>
+          <a:xfrm>
+            <a:off x="1143000" y="685800"/>
+            <a:ext cx="4572000" cy="3429000"/>
+          </a:xfrm>
+          <a:prstGeom prst="rect">
+            <a:avLst/>
+          </a:prstGeom>
+          <a:noFill/>
+          <a:ln w="12700">
+            <a:solidFill>
+              <a:prstClr val="black"/>
+            </a:solidFill>
+          </a:ln>
+        </p:spPr>
+        <p:txBody>
+          <a:bodyPr vert="horz" lIns="91440" tIns="45720" rIns="91440" bIns="45720" rtlCol="0" anchor="ctr"/>
+          <a:lstStyle/>
+          <a:p>
+            <a:endParaRPr lang="en-US"/>
+          </a:p>
+        </p:txBody>
+      </p:sp>
+      <p:sp>
+        <p:nvSpPr>
+          <p:cNvPr id="5" name="Notes Placeholder 4"/>
+          <p:cNvSpPr>
+            <a:spLocks noGrp="1"/>
+          </p:cNvSpPr>
+          <p:nvPr>
+            <p:ph type="body" sz="quarter" idx="3"/>
+          </p:nvPr>
+        </p:nvSpPr>
+        <p:spPr>
+          <a:xfrm>
+            <a:off x="685800" y="4343400"/>
+            <a:ext cx="5486400" cy="4114800"/>
+          </a:xfrm>
+          <a:prstGeom prst="rect">
+            <a:avLst/>
+          </a:prstGeom>
+        </p:spPr>
+        <p:txBody>
+          <a:bodyPr vert="horz" lIns="91440" tIns="45720" rIns="91440" bIns="45720" rtlCol="0"/>
+          <a:lstStyle/>
+          <a:p>
+            <a:pPr lvl="0"/>
+            <a:r>
+              <a:rPr lang="en-US" smtClean="0"/>
+              <a:t>Click to edit Master text styles</a:t>
+            </a:r>
+          </a:p>
+          <a:p>
+            <a:pPr lvl="1"/>
+            <a:r>
+              <a:rPr lang="en-US" smtClean="0"/>
+              <a:t>Second level</a:t>
+            </a:r>
+          </a:p>
+          <a:p>
+            <a:pPr lvl="2"/>
+            <a:r>
+              <a:rPr lang="en-US" smtClean="0"/>
+              <a:t>Third level</a:t>
+            </a:r>
+          </a:p>
+          <a:p>
+            <a:pPr lvl="3"/>
+            <a:r>
+              <a:rPr lang="en-US" smtClean="0"/>
+              <a:t>Fourth level</a:t>
+            </a:r>
+          </a:p>
+          <a:p>
+            <a:pPr lvl="4"/>
+            <a:r>
+              <a:rPr lang="en-US" smtClean="0"/>
+              <a:t>Fifth level</a:t>
+            </a:r>
+            <a:endParaRPr lang="en-US"/>
+          </a:p>
+        </p:txBody>
+      </p:sp>
+      <p:sp>
+        <p:nvSpPr>
+          <p:cNvPr id="6" name="Footer Placeholder 5"/>
+          <p:cNvSpPr>
+            <a:spLocks noGrp="1"/>
+          </p:cNvSpPr>
+          <p:nvPr>
+            <p:ph type="ftr" sz="quarter" idx="4"/>
+          </p:nvPr>
+        </p:nvSpPr>
+        <p:spPr>
+          <a:xfrm>
+            <a:off x="0" y="8685213"/>
+            <a:ext cx="2971800" cy="457200"/>
+          </a:xfrm>
+          <a:prstGeom prst="rect">
+            <a:avLst/>
+          </a:prstGeom>
+        </p:spPr>
+        <p:txBody>
+          <a:bodyPr vert="horz" lIns="91440" tIns="45720" rIns="91440" bIns="45720" rtlCol="0" anchor="b"/>
+          <a:lstStyle>
+            <a:lvl1pPr algn="l">
+              <a:defRPr sz="1200"/>
+            </a:lvl1pPr>
+          </a:lstStyle>
+          <a:p>
+            <a:endParaRPr lang="en-US"/>
+          </a:p>
+        </p:txBody>
+      </p:sp>
+      <p:sp>
+        <p:nvSpPr>
+          <p:cNvPr id="7" name="Slide Number Placeholder 6"/>
+          <p:cNvSpPr>
+            <a:spLocks noGrp="1"/>
+          </p:cNvSpPr>
+          <p:nvPr>
+            <p:ph type="sldNum" sz="quarter" idx="5"/>
+          </p:nvPr>
+        </p:nvSpPr>
+        <p:spPr>
+          <a:xfrm>
+            <a:off x="3884613" y="8685213"/>
+            <a:ext cx="2971800" cy="457200"/>
+          </a:xfrm>
+          <a:prstGeom prst="rect">
+            <a:avLst/>
+          </a:prstGeom>
+        </p:spPr>
+        <p:txBody>
+          <a:bodyPr vert="horz" lIns="91440" tIns="45720" rIns="91440" bIns="45720" rtlCol="0" anchor="b"/>
+          <a:lstStyle>
+            <a:lvl1pPr algn="r">
+              <a:defRPr sz="1200"/>
+            </a:lvl1pPr>
+          </a:lstStyle>
+          <a:p>
+            <a:fld id="{BB5E49A5-4136-284D-997B-48E1D791AD67}" type="slidenum">
+              <a:rPr lang="en-US" smtClean="0"/>
+              <a:t>‹#›</a:t>
+            </a:fld>
+            <a:endParaRPr lang="en-US"/>
+          </a:p>
+        </p:txBody>
+      </p:sp>
+    </p:spTree>
+    <p:extLst>
+      <p:ext uri="{BB962C8B-B14F-4D97-AF65-F5344CB8AC3E}">
+        <p14:creationId xmlns:p14="http://schemas.microsoft.com/office/powerpoint/2010/main" val="2623252185"/>
+      </p:ext>
+    </p:extLst>
+  </p:cSld>
+  <p:clrMap bg1="lt1" tx1="dk1" bg2="lt2" tx2="dk2" accent1="accent1" accent2="accent2" accent3="accent3" accent4="accent4" accent5="accent5" accent6="accent6" hlink="hlink" folHlink="folHlink"/>
+  <p:notesStyle>
+    <a:lvl1pPr marL="0" algn="l" defTabSz="457200" rtl="0" eaLnBrk="1" latinLnBrk="0" hangingPunct="1">
+      <a:defRPr sz="1200" kern="1200">
+        <a:solidFill>
+          <a:schemeClr val="tx1"/>
+        </a:solidFill>
+        <a:latin typeface="+mn-lt"/>
+        <a:ea typeface="+mn-ea"/>
+        <a:cs typeface="+mn-cs"/>
+      </a:defRPr>
+    </a:lvl1pPr>
+    <a:lvl2pPr marL="457200" algn="l" defTabSz="457200" rtl="0" eaLnBrk="1" latinLnBrk="0" hangingPunct="1">
+      <a:defRPr sz="1200" kern="1200">
+        <a:solidFill>
+          <a:schemeClr val="tx1"/>
+        </a:solidFill>
+        <a:latin typeface="+mn-lt"/>
+        <a:ea typeface="+mn-ea"/>
+        <a:cs typeface="+mn-cs"/>
+      </a:defRPr>
+    </a:lvl2pPr>
+    <a:lvl3pPr marL="914400" algn="l" defTabSz="457200" rtl="0" eaLnBrk="1" latinLnBrk="0" hangingPunct="1">
+      <a:defRPr sz="1200" kern="1200">
+        <a:solidFill>
+          <a:schemeClr val="tx1"/>
+        </a:solidFill>
+        <a:latin typeface="+mn-lt"/>
+        <a:ea typeface="+mn-ea"/>
+        <a:cs typeface="+mn-cs"/>
+      </a:defRPr>
+    </a:lvl3pPr>
+    <a:lvl4pPr marL="1371600" algn="l" defTabSz="457200" rtl="0" eaLnBrk="1" latinLnBrk="0" hangingPunct="1">
+      <a:defRPr sz="1200" kern="1200">
+        <a:solidFill>
+          <a:schemeClr val="tx1"/>
+        </a:solidFill>
+        <a:latin typeface="+mn-lt"/>
+        <a:ea typeface="+mn-ea"/>
+        <a:cs typeface="+mn-cs"/>
+      </a:defRPr>
+    </a:lvl4pPr>
+    <a:lvl5pPr marL="1828800" algn="l" defTabSz="457200" rtl="0" eaLnBrk="1" latinLnBrk="0" hangingPunct="1">
+      <a:defRPr sz="1200" kern="1200">
+        <a:solidFill>
+          <a:schemeClr val="tx1"/>
+        </a:solidFill>
+        <a:latin typeface="+mn-lt"/>
+        <a:ea typeface="+mn-ea"/>
+        <a:cs typeface="+mn-cs"/>
+      </a:defRPr>
+    </a:lvl5pPr>
+    <a:lvl6pPr marL="2286000" algn="l" defTabSz="457200" rtl="0" eaLnBrk="1" latinLnBrk="0" hangingPunct="1">
+      <a:defRPr sz="1200" kern="1200">
+        <a:solidFill>
+          <a:schemeClr val="tx1"/>
+        </a:solidFill>
+        <a:latin typeface="+mn-lt"/>
+        <a:ea typeface="+mn-ea"/>
+        <a:cs typeface="+mn-cs"/>
+      </a:defRPr>
+    </a:lvl6pPr>
+    <a:lvl7pPr marL="2743200" algn="l" defTabSz="457200" rtl="0" eaLnBrk="1" latinLnBrk="0" hangingPunct="1">
+      <a:defRPr sz="1200" kern="1200">
+        <a:solidFill>
+          <a:schemeClr val="tx1"/>
+        </a:solidFill>
+        <a:latin typeface="+mn-lt"/>
+        <a:ea typeface="+mn-ea"/>
+        <a:cs typeface="+mn-cs"/>
+      </a:defRPr>
+    </a:lvl7pPr>
+    <a:lvl8pPr marL="3200400" algn="l" defTabSz="457200" rtl="0" eaLnBrk="1" latinLnBrk="0" hangingPunct="1">
+      <a:defRPr sz="1200" kern="1200">
+        <a:solidFill>
+          <a:schemeClr val="tx1"/>
+        </a:solidFill>
+        <a:latin typeface="+mn-lt"/>
+        <a:ea typeface="+mn-ea"/>
+        <a:cs typeface="+mn-cs"/>
+      </a:defRPr>
+    </a:lvl8pPr>
+    <a:lvl9pPr marL="3657600" algn="l" defTabSz="457200" rtl="0" eaLnBrk="1" latinLnBrk="0" hangingPunct="1">
+      <a:defRPr sz="1200" kern="1200">
+        <a:solidFill>
+          <a:schemeClr val="tx1"/>
+        </a:solidFill>
+        <a:latin typeface="+mn-lt"/>
+        <a:ea typeface="+mn-ea"/>
+        <a:cs typeface="+mn-cs"/>
+      </a:defRPr>
+    </a:lvl9pPr>
+  </p:notesStyle>
+</p:notesMaster>
+</file>
+
+<file path=ppt/notesSlides/notesSlide1.xml><?xml version="1.0" encoding="utf-8"?>
+<p:notes xmlns:a="http://schemas.openxmlformats.org/drawingml/2006/main" xmlns:p="http://schemas.openxmlformats.org/presentationml/2006/main" xmlns:r="http://schemas.openxmlformats.org/officeDocument/2006/relationships">
+  <p:cSld>
+    <p:spTree>
+      <p:nvGrpSpPr>
+        <p:cNvPr id="1" name=""/>
+        <p:cNvGrpSpPr/>
+        <p:nvPr/>
+      </p:nvGrpSpPr>
+      <p:grpSpPr>
+        <a:xfrm>
+          <a:off x="0" y="0"/>
+          <a:ext cx="0" cy="0"/>
+          <a:chOff x="0" y="0"/>
+          <a:chExt cx="0" cy="0"/>
+        </a:xfrm>
+      </p:grpSpPr>
+      <p:sp>
+        <p:nvSpPr>
+          <p:cNvPr id="2" name="Slide Image Placeholder 1"/>
+          <p:cNvSpPr>
+            <a:spLocks noGrp="1"/>
+          </p:cNvSpPr>
+          <p:nvPr>
+            <p:ph type="sldImg" idx="2"/>
+          </p:nvPr>
+        </p:nvSpPr>
+        <p:spPr/>
+      </p:sp>
+      <p:sp>
+        <p:nvSpPr>
+          <p:cNvPr id="3" name="Notes Placeholder 2"/>
+          <p:cNvSpPr>
+            <a:spLocks noGrp="1"/>
+          </p:cNvSpPr>
+          <p:nvPr>
+            <p:ph type="body" idx="3" sz="quarter"/>
+          </p:nvPr>
+        </p:nvSpPr>
+        <p:spPr/>
+        <p:txBody>
+          <a:bodyPr/>
+          <a:lstStyle/>
+          <a:p>
+            <a:r>
+              <a:t>皆さん、こんにちは。Harmonic Insightの勉強会にようこそお越しくださいました。</a:t>
+            </a:r>
+          </a:p>
+          <a:p>
+            <a:r>
+              <a:t>本日は「建設業基幹システム リプレースにおけるカスタマイズ多発ポイント」について、業務担当者の皆さんにわかりやすく解説します。</a:t>
+            </a:r>
+          </a:p>
+          <a:p>
+            <a:r>
+              <a:t>建設業のシステムリプレースでは、必ずと言っていいほどカスタマイズの問題が発生します。</a:t>
+            </a:r>
+          </a:p>
+          <a:p>
+            <a:r>
+              <a:t>今日はその原因と解決策を一緒に考えていきましょう。</a:t>
+            </a:r>
+          </a:p>
+        </p:txBody>
+      </p:sp>
+      <p:sp>
+        <p:nvSpPr>
+          <p:cNvPr id="4" name="Slide Number Placeholder 3"/>
+          <p:cNvSpPr>
+            <a:spLocks noGrp="1"/>
+          </p:cNvSpPr>
+          <p:nvPr>
+            <p:ph type="sldNum" idx="5" sz="quarter"/>
+          </p:nvPr>
+        </p:nvSpPr>
+        <p:spPr/>
+      </p:sp>
+    </p:spTree>
+  </p:cSld>
+  <p:clrMapOvr>
+    <a:masterClrMapping/>
+  </p:clrMapOvr>
+</p:notes>
+</file>
+
+<file path=ppt/notesSlides/notesSlide10.xml><?xml version="1.0" encoding="utf-8"?>
+<p:notes xmlns:a="http://schemas.openxmlformats.org/drawingml/2006/main" xmlns:p="http://schemas.openxmlformats.org/presentationml/2006/main" xmlns:r="http://schemas.openxmlformats.org/officeDocument/2006/relationships">
+  <p:cSld>
+    <p:spTree>
+      <p:nvGrpSpPr>
+        <p:cNvPr id="1" name=""/>
+        <p:cNvGrpSpPr/>
+        <p:nvPr/>
+      </p:nvGrpSpPr>
+      <p:grpSpPr>
+        <a:xfrm>
+          <a:off x="0" y="0"/>
+          <a:ext cx="0" cy="0"/>
+          <a:chOff x="0" y="0"/>
+          <a:chExt cx="0" cy="0"/>
+        </a:xfrm>
+      </p:grpSpPr>
+      <p:sp>
+        <p:nvSpPr>
+          <p:cNvPr id="2" name="Slide Image Placeholder 1"/>
+          <p:cNvSpPr>
+            <a:spLocks noGrp="1"/>
+          </p:cNvSpPr>
+          <p:nvPr>
+            <p:ph type="sldImg" idx="2"/>
+          </p:nvPr>
+        </p:nvSpPr>
+        <p:spPr/>
+      </p:sp>
+      <p:sp>
+        <p:nvSpPr>
+          <p:cNvPr id="3" name="Notes Placeholder 2"/>
+          <p:cNvSpPr>
+            <a:spLocks noGrp="1"/>
+          </p:cNvSpPr>
+          <p:nvPr>
+            <p:ph type="body" idx="3" sz="quarter"/>
+          </p:nvPr>
+        </p:nvSpPr>
+        <p:spPr/>
+        <p:txBody>
+          <a:bodyPr/>
+          <a:lstStyle/>
+          <a:p>
+            <a:r>
+              <a:t>第3章、経費精算・現場管理です。現場のリアルを捉える経費処理の最適化が課題です。</a:t>
+            </a:r>
+          </a:p>
+          <a:p>
+            <a:r>
+              <a:t>左側に現場で起きていることを3つ挙げています。</a:t>
+            </a:r>
+          </a:p>
+          <a:p>
+            <a:r>
+              <a:t>まず「現場経費と一般経費の区分」。どこまでが現場の費用なのか、分類基準が人によってバラバラです。</a:t>
+            </a:r>
+          </a:p>
+          <a:p>
+            <a:r>
+              <a:t>次に「立替・仮払い」。現場監督が自腹で立て替え、精算が月末に集中してパンクする。よくある話ですね。</a:t>
+            </a:r>
+          </a:p>
+          <a:p>
+            <a:r>
+              <a:t>そして「安全対策費」。安全大会や保護具の費用を工事原価に入れるのか入れないのか、判断が分かれます。</a:t>
+            </a:r>
+          </a:p>
+          <a:p>
+            <a:r>
+              <a:t>右側の標準化アプローチでは3つの解決策を提示しています。</a:t>
+            </a:r>
+          </a:p>
+          <a:p>
+            <a:r>
+              <a:t>1つ目、経費分類マスタの標準化で業界共通のルールを適用する。</a:t>
+            </a:r>
+          </a:p>
+          <a:p>
+            <a:r>
+              <a:t>2つ目、モバイルアプリで現場から即時申請。写真やGPS情報を自動付与することで精度を上げる。</a:t>
+            </a:r>
+          </a:p>
+          <a:p>
+            <a:r>
+              <a:t>3つ目、工事別・費目別の自動配賦を設定ベースで柔軟に対応する。</a:t>
+            </a:r>
+          </a:p>
+        </p:txBody>
+      </p:sp>
+      <p:sp>
+        <p:nvSpPr>
+          <p:cNvPr id="4" name="Slide Number Placeholder 3"/>
+          <p:cNvSpPr>
+            <a:spLocks noGrp="1"/>
+          </p:cNvSpPr>
+          <p:nvPr>
+            <p:ph type="sldNum" idx="5" sz="quarter"/>
+          </p:nvPr>
+        </p:nvSpPr>
+        <p:spPr/>
+      </p:sp>
+    </p:spTree>
+  </p:cSld>
+  <p:clrMapOvr>
+    <a:masterClrMapping/>
+  </p:clrMapOvr>
+</p:notes>
+</file>
+
+<file path=ppt/notesSlides/notesSlide11.xml><?xml version="1.0" encoding="utf-8"?>
+<p:notes xmlns:a="http://schemas.openxmlformats.org/drawingml/2006/main" xmlns:p="http://schemas.openxmlformats.org/presentationml/2006/main" xmlns:r="http://schemas.openxmlformats.org/officeDocument/2006/relationships">
+  <p:cSld>
+    <p:spTree>
+      <p:nvGrpSpPr>
+        <p:cNvPr id="1" name=""/>
+        <p:cNvGrpSpPr/>
+        <p:nvPr/>
+      </p:nvGrpSpPr>
+      <p:grpSpPr>
+        <a:xfrm>
+          <a:off x="0" y="0"/>
+          <a:ext cx="0" cy="0"/>
+          <a:chOff x="0" y="0"/>
+          <a:chExt cx="0" cy="0"/>
+        </a:xfrm>
+      </p:grpSpPr>
+      <p:sp>
+        <p:nvSpPr>
+          <p:cNvPr id="2" name="Slide Image Placeholder 1"/>
+          <p:cNvSpPr>
+            <a:spLocks noGrp="1"/>
+          </p:cNvSpPr>
+          <p:nvPr>
+            <p:ph type="sldImg" idx="2"/>
+          </p:nvPr>
+        </p:nvSpPr>
+        <p:spPr/>
+      </p:sp>
+      <p:sp>
+        <p:nvSpPr>
+          <p:cNvPr id="3" name="Notes Placeholder 2"/>
+          <p:cNvSpPr>
+            <a:spLocks noGrp="1"/>
+          </p:cNvSpPr>
+          <p:nvPr>
+            <p:ph type="body" idx="3" sz="quarter"/>
+          </p:nvPr>
+        </p:nvSpPr>
+        <p:spPr/>
+        <p:txBody>
+          <a:bodyPr/>
+          <a:lstStyle/>
+          <a:p>
+            <a:r>
+              <a:t>第4章、購買・在庫管理です。建設業の購買は、工場の製造業とは全く違う特徴があります。</a:t>
+            </a:r>
+          </a:p>
+          <a:p>
+            <a:r>
+              <a:t>上部のフロー図をご覧ください。現場で資材が必要になると、倉庫を通さず現場に直送するケースが多い。都度購入が基本で、従来の在庫管理の概念が当てはまりません。</a:t>
+            </a:r>
+          </a:p>
+          <a:p>
+            <a:r>
+              <a:t>左下の課題にある通り、「倉庫を通さないから在庫管理ができない」「現場で急に必要な資材をその場で発注したい」という声があります。発注イコール検収イコール原価計上の一気通貫処理が必要なのです。</a:t>
+            </a:r>
+          </a:p>
+          <a:p>
+            <a:r>
+              <a:t>右下はレンタル・仮設材の課題です。重機レンタルの日割り計算が複雑だったり、仮設材を他の現場に転用したいというニーズがあります。</a:t>
+            </a:r>
+          </a:p>
+          <a:p>
+            <a:r>
+              <a:t>レンタル期間の自動計算テンプレート、仮設材の現場間移動トラッキング、月額・日額の自動按分処理。これらを標準機能として提供することで、カスタマイズを減らせます。</a:t>
+            </a:r>
+          </a:p>
+        </p:txBody>
+      </p:sp>
+      <p:sp>
+        <p:nvSpPr>
+          <p:cNvPr id="4" name="Slide Number Placeholder 3"/>
+          <p:cNvSpPr>
+            <a:spLocks noGrp="1"/>
+          </p:cNvSpPr>
+          <p:nvPr>
+            <p:ph type="sldNum" idx="5" sz="quarter"/>
+          </p:nvPr>
+        </p:nvSpPr>
+        <p:spPr/>
+      </p:sp>
+    </p:spTree>
+  </p:cSld>
+  <p:clrMapOvr>
+    <a:masterClrMapping/>
+  </p:clrMapOvr>
+</p:notes>
+</file>
+
+<file path=ppt/notesSlides/notesSlide12.xml><?xml version="1.0" encoding="utf-8"?>
+<p:notes xmlns:a="http://schemas.openxmlformats.org/drawingml/2006/main" xmlns:p="http://schemas.openxmlformats.org/presentationml/2006/main" xmlns:r="http://schemas.openxmlformats.org/officeDocument/2006/relationships">
+  <p:cSld>
+    <p:spTree>
+      <p:nvGrpSpPr>
+        <p:cNvPr id="1" name=""/>
+        <p:cNvGrpSpPr/>
+        <p:nvPr/>
+      </p:nvGrpSpPr>
+      <p:grpSpPr>
+        <a:xfrm>
+          <a:off x="0" y="0"/>
+          <a:ext cx="0" cy="0"/>
+          <a:chOff x="0" y="0"/>
+          <a:chExt cx="0" cy="0"/>
+        </a:xfrm>
+      </p:grpSpPr>
+      <p:sp>
+        <p:nvSpPr>
+          <p:cNvPr id="2" name="Slide Image Placeholder 1"/>
+          <p:cNvSpPr>
+            <a:spLocks noGrp="1"/>
+          </p:cNvSpPr>
+          <p:nvPr>
+            <p:ph type="sldImg" idx="2"/>
+          </p:nvPr>
+        </p:nvSpPr>
+        <p:spPr/>
+      </p:sp>
+      <p:sp>
+        <p:nvSpPr>
+          <p:cNvPr id="3" name="Notes Placeholder 2"/>
+          <p:cNvSpPr>
+            <a:spLocks noGrp="1"/>
+          </p:cNvSpPr>
+          <p:nvPr>
+            <p:ph type="body" idx="3" sz="quarter"/>
+          </p:nvPr>
+        </p:nvSpPr>
+        <p:spPr/>
+        <p:txBody>
+          <a:bodyPr/>
+          <a:lstStyle/>
+          <a:p>
+            <a:r>
+              <a:t>第5章、ワークフロー・承認プロセスです。柔軟性と統制を両立させる電子化がテーマです。</a:t>
+            </a:r>
+          </a:p>
+          <a:p>
+            <a:r>
+              <a:t>建設業の承認フローは特殊で、現場担当から現場所長、部門長、経理部、社長と多段階の承認が必要です。しかも、金額によって承認ルートが変わります。</a:t>
+            </a:r>
+          </a:p>
+          <a:p>
+            <a:r>
+              <a:t>表に4つのよくある課題と標準化の方向性を示しています。</a:t>
+            </a:r>
+          </a:p>
+          <a:p>
+            <a:r>
+              <a:t>金額や工種で承認ルートが変わる課題には、条件分岐テンプレートで対応。</a:t>
+            </a:r>
+          </a:p>
+          <a:p>
+            <a:r>
+              <a:t>現場の承認者がなかなか承認できない問題には、モバイル承認と代理承認機能を標準搭載。</a:t>
+            </a:r>
+          </a:p>
+          <a:p>
+            <a:r>
+              <a:t>緊急時の事後承認フローがない課題には、緊急承認ワークフローの標準パターンを提供。</a:t>
+            </a:r>
+          </a:p>
+          <a:p>
+            <a:r>
+              <a:t>紙の稟議書とシステムの二重管理には、紙帳票の電子化テンプレートを提供。</a:t>
+            </a:r>
+          </a:p>
+          <a:p>
+            <a:r>
+              <a:t>これらは多くの建設会社で共通する課題ですので、標準機能として実装すべき内容です。</a:t>
+            </a:r>
+          </a:p>
+        </p:txBody>
+      </p:sp>
+      <p:sp>
+        <p:nvSpPr>
+          <p:cNvPr id="4" name="Slide Number Placeholder 3"/>
+          <p:cNvSpPr>
+            <a:spLocks noGrp="1"/>
+          </p:cNvSpPr>
+          <p:nvPr>
+            <p:ph type="sldNum" idx="5" sz="quarter"/>
+          </p:nvPr>
+        </p:nvSpPr>
+        <p:spPr/>
+      </p:sp>
+    </p:spTree>
+  </p:cSld>
+  <p:clrMapOvr>
+    <a:masterClrMapping/>
+  </p:clrMapOvr>
+</p:notes>
+</file>
+
+<file path=ppt/notesSlides/notesSlide13.xml><?xml version="1.0" encoding="utf-8"?>
+<p:notes xmlns:a="http://schemas.openxmlformats.org/drawingml/2006/main" xmlns:p="http://schemas.openxmlformats.org/presentationml/2006/main" xmlns:r="http://schemas.openxmlformats.org/officeDocument/2006/relationships">
+  <p:cSld>
+    <p:spTree>
+      <p:nvGrpSpPr>
+        <p:cNvPr id="1" name=""/>
+        <p:cNvGrpSpPr/>
+        <p:nvPr/>
+      </p:nvGrpSpPr>
+      <p:grpSpPr>
+        <a:xfrm>
+          <a:off x="0" y="0"/>
+          <a:ext cx="0" cy="0"/>
+          <a:chOff x="0" y="0"/>
+          <a:chExt cx="0" cy="0"/>
+        </a:xfrm>
+      </p:grpSpPr>
+      <p:sp>
+        <p:nvSpPr>
+          <p:cNvPr id="2" name="Slide Image Placeholder 1"/>
+          <p:cNvSpPr>
+            <a:spLocks noGrp="1"/>
+          </p:cNvSpPr>
+          <p:nvPr>
+            <p:ph type="sldImg" idx="2"/>
+          </p:nvPr>
+        </p:nvSpPr>
+        <p:spPr/>
+      </p:sp>
+      <p:sp>
+        <p:nvSpPr>
+          <p:cNvPr id="3" name="Notes Placeholder 2"/>
+          <p:cNvSpPr>
+            <a:spLocks noGrp="1"/>
+          </p:cNvSpPr>
+          <p:nvPr>
+            <p:ph type="body" idx="3" sz="quarter"/>
+          </p:nvPr>
+        </p:nvSpPr>
+        <p:spPr/>
+        <p:txBody>
+          <a:bodyPr/>
+          <a:lstStyle/>
+          <a:p>
+            <a:r>
+              <a:t>第6章、出面管理・労務管理です。現場の勤怠を正確に把握し、法令遵守を支援する領域です。</a:t>
+            </a:r>
+          </a:p>
+          <a:p>
+            <a:r>
+              <a:t>支払形態が多様なのが建設業の特徴です。常用は日当掛ける日数、月極は月額固定、出来高払いは作業量に応じて支払う。それぞれ異なる課題があります。</a:t>
+            </a:r>
+          </a:p>
+          <a:p>
+            <a:r>
+              <a:t>右側の法令遵守のポイントは特に重要です。</a:t>
+            </a:r>
+          </a:p>
+          <a:p>
+            <a:r>
+              <a:t>外国人労働者の在留資格管理では、期限アラート機能が必須です。これを見逃すと法令違反になります。</a:t>
+            </a:r>
+          </a:p>
+          <a:p>
+            <a:r>
+              <a:t>建退共の掛金管理やCCUS連携では、就業実績から証紙枚数を自動計算する仕組みが必要です。</a:t>
+            </a:r>
+          </a:p>
+          <a:p>
+            <a:r>
+              <a:t>そして労働時間の上限規制。2024年4月から建設業にも適用された残業規制に対応するため、残業時間の自動集計とアラートが不可欠です。</a:t>
+            </a:r>
+          </a:p>
+          <a:p>
+            <a:r>
+              <a:t>下の標準化のポイントにある通り、GPSや顔認証、ICカードによる出退勤データの自動取得から、日報との連携、支払計算の自動化まで一気通貫で標準化すべきです。</a:t>
+            </a:r>
+          </a:p>
+        </p:txBody>
+      </p:sp>
+      <p:sp>
+        <p:nvSpPr>
+          <p:cNvPr id="4" name="Slide Number Placeholder 3"/>
+          <p:cNvSpPr>
+            <a:spLocks noGrp="1"/>
+          </p:cNvSpPr>
+          <p:nvPr>
+            <p:ph type="sldNum" idx="5" sz="quarter"/>
+          </p:nvPr>
+        </p:nvSpPr>
+        <p:spPr/>
+      </p:sp>
+    </p:spTree>
+  </p:cSld>
+  <p:clrMapOvr>
+    <a:masterClrMapping/>
+  </p:clrMapOvr>
+</p:notes>
+</file>
+
+<file path=ppt/notesSlides/notesSlide14.xml><?xml version="1.0" encoding="utf-8"?>
+<p:notes xmlns:a="http://schemas.openxmlformats.org/drawingml/2006/main" xmlns:p="http://schemas.openxmlformats.org/presentationml/2006/main" xmlns:r="http://schemas.openxmlformats.org/officeDocument/2006/relationships">
+  <p:cSld>
+    <p:spTree>
+      <p:nvGrpSpPr>
+        <p:cNvPr id="1" name=""/>
+        <p:cNvGrpSpPr/>
+        <p:nvPr/>
+      </p:nvGrpSpPr>
+      <p:grpSpPr>
+        <a:xfrm>
+          <a:off x="0" y="0"/>
+          <a:ext cx="0" cy="0"/>
+          <a:chOff x="0" y="0"/>
+          <a:chExt cx="0" cy="0"/>
+        </a:xfrm>
+      </p:grpSpPr>
+      <p:sp>
+        <p:nvSpPr>
+          <p:cNvPr id="2" name="Slide Image Placeholder 1"/>
+          <p:cNvSpPr>
+            <a:spLocks noGrp="1"/>
+          </p:cNvSpPr>
+          <p:nvPr>
+            <p:ph type="sldImg" idx="2"/>
+          </p:nvPr>
+        </p:nvSpPr>
+        <p:spPr/>
+      </p:sp>
+      <p:sp>
+        <p:nvSpPr>
+          <p:cNvPr id="3" name="Notes Placeholder 2"/>
+          <p:cNvSpPr>
+            <a:spLocks noGrp="1"/>
+          </p:cNvSpPr>
+          <p:nvPr>
+            <p:ph type="body" idx="3" sz="quarter"/>
+          </p:nvPr>
+        </p:nvSpPr>
+        <p:spPr/>
+        <p:txBody>
+          <a:bodyPr/>
+          <a:lstStyle/>
+          <a:p>
+            <a:r>
+              <a:t>第7章、個別帳票・レポートです。これはカスタマイズ要望が最も多い領域の一つです。</a:t>
+            </a:r>
+          </a:p>
+          <a:p>
+            <a:r>
+              <a:t>帳票カスタマイズが多発する理由は4つあります。</a:t>
+            </a:r>
+          </a:p>
+          <a:p>
+            <a:r>
+              <a:t>施主ごとに提出フォーマットが違う、社内の管理帳票が独自フォーマット、法定帳票の書式が頻繁に改定される、そして経営層が「この形で見たい」にこだわる。</a:t>
+            </a:r>
+          </a:p>
+          <a:p>
+            <a:r>
+              <a:t>標準化アプローチとしては、BIツール連携でノーコードのレポート作成、業界標準の帳票テンプレートの標準搭載、自由な加工ができるExcel出力、そしてリアルタイムの経営指標ダッシュボードです。</a:t>
+            </a:r>
+          </a:p>
+          <a:p>
+            <a:r>
+              <a:t>下のBefore/Afterを見てください。従来は工事月報、原価報告書、安全書類、施主報告と帳票ごとに個別開発していました。</a:t>
+            </a:r>
+          </a:p>
+          <a:p>
+            <a:r>
+              <a:t>標準化後は、共通データ基盤からBIツールで自在に出力する形に変わります。</a:t>
+            </a:r>
+          </a:p>
+          <a:p>
+            <a:r>
+              <a:t>「帳票はもう作るのではなく、選ぶ時代へ」。データさえあれば、見せ方は自由に変えられるのです。</a:t>
+            </a:r>
+          </a:p>
+        </p:txBody>
+      </p:sp>
+      <p:sp>
+        <p:nvSpPr>
+          <p:cNvPr id="4" name="Slide Number Placeholder 3"/>
+          <p:cNvSpPr>
+            <a:spLocks noGrp="1"/>
+          </p:cNvSpPr>
+          <p:nvPr>
+            <p:ph type="sldNum" idx="5" sz="quarter"/>
+          </p:nvPr>
+        </p:nvSpPr>
+        <p:spPr/>
+      </p:sp>
+    </p:spTree>
+  </p:cSld>
+  <p:clrMapOvr>
+    <a:masterClrMapping/>
+  </p:clrMapOvr>
+</p:notes>
+</file>
+
+<file path=ppt/notesSlides/notesSlide15.xml><?xml version="1.0" encoding="utf-8"?>
+<p:notes xmlns:a="http://schemas.openxmlformats.org/drawingml/2006/main" xmlns:p="http://schemas.openxmlformats.org/presentationml/2006/main" xmlns:r="http://schemas.openxmlformats.org/officeDocument/2006/relationships">
+  <p:cSld>
+    <p:spTree>
+      <p:nvGrpSpPr>
+        <p:cNvPr id="1" name=""/>
+        <p:cNvGrpSpPr/>
+        <p:nvPr/>
+      </p:nvGrpSpPr>
+      <p:grpSpPr>
+        <a:xfrm>
+          <a:off x="0" y="0"/>
+          <a:ext cx="0" cy="0"/>
+          <a:chOff x="0" y="0"/>
+          <a:chExt cx="0" cy="0"/>
+        </a:xfrm>
+      </p:grpSpPr>
+      <p:sp>
+        <p:nvSpPr>
+          <p:cNvPr id="2" name="Slide Image Placeholder 1"/>
+          <p:cNvSpPr>
+            <a:spLocks noGrp="1"/>
+          </p:cNvSpPr>
+          <p:nvPr>
+            <p:ph type="sldImg" idx="2"/>
+          </p:nvPr>
+        </p:nvSpPr>
+        <p:spPr/>
+      </p:sp>
+      <p:sp>
+        <p:nvSpPr>
+          <p:cNvPr id="3" name="Notes Placeholder 2"/>
+          <p:cNvSpPr>
+            <a:spLocks noGrp="1"/>
+          </p:cNvSpPr>
+          <p:nvPr>
+            <p:ph type="body" idx="3" sz="quarter"/>
+          </p:nvPr>
+        </p:nvSpPr>
+        <p:spPr/>
+        <p:txBody>
+          <a:bodyPr/>
+          <a:lstStyle/>
+          <a:p>
+            <a:r>
+              <a:t>ここからは第8章、標準化・テンプレート化への戦略的アプローチに入ります。</a:t>
+            </a:r>
+          </a:p>
+          <a:p>
+            <a:r>
+              <a:t>7つの業務領域でカスタマイズが多発する課題を見てきましたが、ここからはその解決策です。</a:t>
+            </a:r>
+          </a:p>
+          <a:p>
+            <a:r>
+              <a:t>カスタマイズ地獄から抜け出す5つの鍵をお伝えします。</a:t>
+            </a:r>
+          </a:p>
+          <a:p>
+            <a:r>
+              <a:t>この考え方を身につければ、次のシステムリプレースでは全く違うアプローチが可能になります。</a:t>
+            </a:r>
+          </a:p>
+        </p:txBody>
+      </p:sp>
+      <p:sp>
+        <p:nvSpPr>
+          <p:cNvPr id="4" name="Slide Number Placeholder 3"/>
+          <p:cNvSpPr>
+            <a:spLocks noGrp="1"/>
+          </p:cNvSpPr>
+          <p:nvPr>
+            <p:ph type="sldNum" idx="5" sz="quarter"/>
+          </p:nvPr>
+        </p:nvSpPr>
+        <p:spPr/>
+      </p:sp>
+    </p:spTree>
+  </p:cSld>
+  <p:clrMapOvr>
+    <a:masterClrMapping/>
+  </p:clrMapOvr>
+</p:notes>
+</file>
+
+<file path=ppt/notesSlides/notesSlide16.xml><?xml version="1.0" encoding="utf-8"?>
+<p:notes xmlns:a="http://schemas.openxmlformats.org/drawingml/2006/main" xmlns:p="http://schemas.openxmlformats.org/presentationml/2006/main" xmlns:r="http://schemas.openxmlformats.org/officeDocument/2006/relationships">
+  <p:cSld>
+    <p:spTree>
+      <p:nvGrpSpPr>
+        <p:cNvPr id="1" name=""/>
+        <p:cNvGrpSpPr/>
+        <p:nvPr/>
+      </p:nvGrpSpPr>
+      <p:grpSpPr>
+        <a:xfrm>
+          <a:off x="0" y="0"/>
+          <a:ext cx="0" cy="0"/>
+          <a:chOff x="0" y="0"/>
+          <a:chExt cx="0" cy="0"/>
+        </a:xfrm>
+      </p:grpSpPr>
+      <p:sp>
+        <p:nvSpPr>
+          <p:cNvPr id="2" name="Slide Image Placeholder 1"/>
+          <p:cNvSpPr>
+            <a:spLocks noGrp="1"/>
+          </p:cNvSpPr>
+          <p:nvPr>
+            <p:ph type="sldImg" idx="2"/>
+          </p:nvPr>
+        </p:nvSpPr>
+        <p:spPr/>
+      </p:sp>
+      <p:sp>
+        <p:nvSpPr>
+          <p:cNvPr id="3" name="Notes Placeholder 2"/>
+          <p:cNvSpPr>
+            <a:spLocks noGrp="1"/>
+          </p:cNvSpPr>
+          <p:nvPr>
+            <p:ph type="body" idx="3" sz="quarter"/>
+          </p:nvPr>
+        </p:nvSpPr>
+        <p:spPr/>
+        <p:txBody>
+          <a:bodyPr/>
+          <a:lstStyle/>
+          <a:p>
+            <a:r>
+              <a:t>カスタマイズ地獄を脱出する5つの戦略です。</a:t>
+            </a:r>
+          </a:p>
+          <a:p>
+            <a:r>
+              <a:t>第1に業界標準テンプレート。国交省基準をベースに、業界共通のマスタや帳票を整備します。</a:t>
+            </a:r>
+          </a:p>
+          <a:p>
+            <a:r>
+              <a:t>第2にノーコード・ローコード活用。プログラミング不要で設定変更できる仕組みを最大限活用します。これにより、従来カスタマイズとして開発していた変更を、設定変更で対応できるようになります。</a:t>
+            </a:r>
+          </a:p>
+          <a:p>
+            <a:r>
+              <a:t>第3にAPI連携の標準化。外部システムとのデータ連携を標準インターフェースで実現します。</a:t>
+            </a:r>
+          </a:p>
+          <a:p>
+            <a:r>
+              <a:t>第4にFit&amp;Gap分析の革新。「できないこと」を探すのではなく、「どう合わせるか」を提案する発想の転換です。これが最も重要かもしれません。</a:t>
+            </a:r>
+          </a:p>
+          <a:p>
+            <a:r>
+              <a:t>第5にモバイル活用。現場からの入力をスマホやタブレットで最適化します。</a:t>
+            </a:r>
+          </a:p>
+          <a:p>
+            <a:r>
+              <a:t>この5つの戦略を組み合わせることで、カスタマイズを大幅に削減できます。</a:t>
+            </a:r>
+          </a:p>
+        </p:txBody>
+      </p:sp>
+      <p:sp>
+        <p:nvSpPr>
+          <p:cNvPr id="4" name="Slide Number Placeholder 3"/>
+          <p:cNvSpPr>
+            <a:spLocks noGrp="1"/>
+          </p:cNvSpPr>
+          <p:nvPr>
+            <p:ph type="sldNum" idx="5" sz="quarter"/>
+          </p:nvPr>
+        </p:nvSpPr>
+        <p:spPr/>
+      </p:sp>
+    </p:spTree>
+  </p:cSld>
+  <p:clrMapOvr>
+    <a:masterClrMapping/>
+  </p:clrMapOvr>
+</p:notes>
+</file>
+
+<file path=ppt/notesSlides/notesSlide17.xml><?xml version="1.0" encoding="utf-8"?>
+<p:notes xmlns:a="http://schemas.openxmlformats.org/drawingml/2006/main" xmlns:p="http://schemas.openxmlformats.org/presentationml/2006/main" xmlns:r="http://schemas.openxmlformats.org/officeDocument/2006/relationships">
+  <p:cSld>
+    <p:spTree>
+      <p:nvGrpSpPr>
+        <p:cNvPr id="1" name=""/>
+        <p:cNvGrpSpPr/>
+        <p:nvPr/>
+      </p:nvGrpSpPr>
+      <p:grpSpPr>
+        <a:xfrm>
+          <a:off x="0" y="0"/>
+          <a:ext cx="0" cy="0"/>
+          <a:chOff x="0" y="0"/>
+          <a:chExt cx="0" cy="0"/>
+        </a:xfrm>
+      </p:grpSpPr>
+      <p:sp>
+        <p:nvSpPr>
+          <p:cNvPr id="2" name="Slide Image Placeholder 1"/>
+          <p:cNvSpPr>
+            <a:spLocks noGrp="1"/>
+          </p:cNvSpPr>
+          <p:nvPr>
+            <p:ph type="sldImg" idx="2"/>
+          </p:nvPr>
+        </p:nvSpPr>
+        <p:spPr/>
+      </p:sp>
+      <p:sp>
+        <p:nvSpPr>
+          <p:cNvPr id="3" name="Notes Placeholder 2"/>
+          <p:cNvSpPr>
+            <a:spLocks noGrp="1"/>
+          </p:cNvSpPr>
+          <p:nvPr>
+            <p:ph type="body" idx="3" sz="quarter"/>
+          </p:nvPr>
+        </p:nvSpPr>
+        <p:spPr/>
+        <p:txBody>
+          <a:bodyPr/>
+          <a:lstStyle/>
+          <a:p>
+            <a:r>
+              <a:t>Fit&amp;Gap分析の新しい考え方について詳しく見ていきます。</a:t>
+            </a:r>
+          </a:p>
+          <a:p>
+            <a:r>
+              <a:t>左側が従来のアプローチ。標準機能を見せて、「できないこと」を洗い出し、「できないならカスタマイズ」となり、費用が膨らむ。この流れに心当たりがある方も多いのではないでしょうか。</a:t>
+            </a:r>
+          </a:p>
+          <a:p>
+            <a:r>
+              <a:t>右側が新しいアプローチ。まず業務プロセスを深く理解し、「本当に必要か」を問い直します。そして標準機能で「どう実現するか」を提案し、場合によっては業務の方を変える選択肢も提示します。</a:t>
+            </a:r>
+          </a:p>
+          <a:p>
+            <a:r>
+              <a:t>下のFit&amp;Gap分析3段階アプローチが実践的なフレームワークです。</a:t>
+            </a:r>
+          </a:p>
+          <a:p>
+            <a:r>
+              <a:t>レベル1は設定で対応。標準のパラメータ設定で解決できないかをまず検討します。</a:t>
+            </a:r>
+          </a:p>
+          <a:p>
+            <a:r>
+              <a:t>レベル2は運用で対応。業務プロセスの見直しで標準に合わせられないかを考えます。</a:t>
+            </a:r>
+          </a:p>
+          <a:p>
+            <a:r>
+              <a:t>レベル3がアドオンで対応。本当にカスタマイズが必要な最小限の範囲だけを特定します。</a:t>
+            </a:r>
+          </a:p>
+          <a:p>
+            <a:r>
+              <a:t>この順番で検討することで、カスタマイズ量を劇的に減らせるのです。</a:t>
+            </a:r>
+          </a:p>
+        </p:txBody>
+      </p:sp>
+      <p:sp>
+        <p:nvSpPr>
+          <p:cNvPr id="4" name="Slide Number Placeholder 3"/>
+          <p:cNvSpPr>
+            <a:spLocks noGrp="1"/>
+          </p:cNvSpPr>
+          <p:nvPr>
+            <p:ph type="sldNum" idx="5" sz="quarter"/>
+          </p:nvPr>
+        </p:nvSpPr>
+        <p:spPr/>
+      </p:sp>
+    </p:spTree>
+  </p:cSld>
+  <p:clrMapOvr>
+    <a:masterClrMapping/>
+  </p:clrMapOvr>
+</p:notes>
+</file>
+
+<file path=ppt/notesSlides/notesSlide18.xml><?xml version="1.0" encoding="utf-8"?>
+<p:notes xmlns:a="http://schemas.openxmlformats.org/drawingml/2006/main" xmlns:p="http://schemas.openxmlformats.org/presentationml/2006/main" xmlns:r="http://schemas.openxmlformats.org/officeDocument/2006/relationships">
+  <p:cSld>
+    <p:spTree>
+      <p:nvGrpSpPr>
+        <p:cNvPr id="1" name=""/>
+        <p:cNvGrpSpPr/>
+        <p:nvPr/>
+      </p:nvGrpSpPr>
+      <p:grpSpPr>
+        <a:xfrm>
+          <a:off x="0" y="0"/>
+          <a:ext cx="0" cy="0"/>
+          <a:chOff x="0" y="0"/>
+          <a:chExt cx="0" cy="0"/>
+        </a:xfrm>
+      </p:grpSpPr>
+      <p:sp>
+        <p:nvSpPr>
+          <p:cNvPr id="2" name="Slide Image Placeholder 1"/>
+          <p:cNvSpPr>
+            <a:spLocks noGrp="1"/>
+          </p:cNvSpPr>
+          <p:nvPr>
+            <p:ph type="sldImg" idx="2"/>
+          </p:nvPr>
+        </p:nvSpPr>
+        <p:spPr/>
+      </p:sp>
+      <p:sp>
+        <p:nvSpPr>
+          <p:cNvPr id="3" name="Notes Placeholder 2"/>
+          <p:cNvSpPr>
+            <a:spLocks noGrp="1"/>
+          </p:cNvSpPr>
+          <p:nvPr>
+            <p:ph type="body" idx="3" sz="quarter"/>
+          </p:nvPr>
+        </p:nvSpPr>
+        <p:spPr/>
+        <p:txBody>
+          <a:bodyPr/>
+          <a:lstStyle/>
+          <a:p>
+            <a:r>
+              <a:t>カスタマイズ影響度マトリックスです。7つの業務領域を4つの軸で評価しています。</a:t>
+            </a:r>
+          </a:p>
+          <a:p>
+            <a:r>
+              <a:t>カスタマイズ発生頻度、影響範囲、標準化の難易度、そして優先度です。</a:t>
+            </a:r>
+          </a:p>
+          <a:p>
+            <a:r>
+              <a:t>原価管理・工事採算は発生頻度が非常に高く、経営判断に直結するため最優先です。ただし標準化難易度も高いので、段階的に取り組む必要があります。</a:t>
+            </a:r>
+          </a:p>
+          <a:p>
+            <a:r>
+              <a:t>契約・請求・入金と出面・労務管理は優先度が高い。法令遵守や取引先との関係に影響するためです。</a:t>
+            </a:r>
+          </a:p>
+          <a:p>
+            <a:r>
+              <a:t>経費精算・現場管理とワークフローは標準化難易度が低く、早期に着手すべき領域です。すぐに効果が出やすいところです。</a:t>
+            </a:r>
+          </a:p>
+          <a:p>
+            <a:r>
+              <a:t>個別帳票は発生頻度が非常に高いですが、BIツールの活用で解決できます。</a:t>
+            </a:r>
+          </a:p>
+          <a:p>
+            <a:r>
+              <a:t>下のメッセージの通り、標準化難易度が低い領域から着手し、段階的にシステム全体を標準化していくのが最も効果的なアプローチです。</a:t>
+            </a:r>
+          </a:p>
+        </p:txBody>
+      </p:sp>
+      <p:sp>
+        <p:nvSpPr>
+          <p:cNvPr id="4" name="Slide Number Placeholder 3"/>
+          <p:cNvSpPr>
+            <a:spLocks noGrp="1"/>
+          </p:cNvSpPr>
+          <p:nvPr>
+            <p:ph type="sldNum" idx="5" sz="quarter"/>
+          </p:nvPr>
+        </p:nvSpPr>
+        <p:spPr/>
+      </p:sp>
+    </p:spTree>
+  </p:cSld>
+  <p:clrMapOvr>
+    <a:masterClrMapping/>
+  </p:clrMapOvr>
+</p:notes>
+</file>
+
+<file path=ppt/notesSlides/notesSlide19.xml><?xml version="1.0" encoding="utf-8"?>
+<p:notes xmlns:a="http://schemas.openxmlformats.org/drawingml/2006/main" xmlns:p="http://schemas.openxmlformats.org/presentationml/2006/main" xmlns:r="http://schemas.openxmlformats.org/officeDocument/2006/relationships">
+  <p:cSld>
+    <p:spTree>
+      <p:nvGrpSpPr>
+        <p:cNvPr id="1" name=""/>
+        <p:cNvGrpSpPr/>
+        <p:nvPr/>
+      </p:nvGrpSpPr>
+      <p:grpSpPr>
+        <a:xfrm>
+          <a:off x="0" y="0"/>
+          <a:ext cx="0" cy="0"/>
+          <a:chOff x="0" y="0"/>
+          <a:chExt cx="0" cy="0"/>
+        </a:xfrm>
+      </p:grpSpPr>
+      <p:sp>
+        <p:nvSpPr>
+          <p:cNvPr id="2" name="Slide Image Placeholder 1"/>
+          <p:cNvSpPr>
+            <a:spLocks noGrp="1"/>
+          </p:cNvSpPr>
+          <p:nvPr>
+            <p:ph type="sldImg" idx="2"/>
+          </p:nvPr>
+        </p:nvSpPr>
+        <p:spPr/>
+      </p:sp>
+      <p:sp>
+        <p:nvSpPr>
+          <p:cNvPr id="3" name="Notes Placeholder 2"/>
+          <p:cNvSpPr>
+            <a:spLocks noGrp="1"/>
+          </p:cNvSpPr>
+          <p:nvPr>
+            <p:ph type="body" idx="3" sz="quarter"/>
+          </p:nvPr>
+        </p:nvSpPr>
+        <p:spPr/>
+        <p:txBody>
+          <a:bodyPr/>
+          <a:lstStyle/>
+          <a:p>
+            <a:r>
+              <a:t>最後のまとめです。3つのキーメッセージを確認しましょう。</a:t>
+            </a:r>
+          </a:p>
+          <a:p>
+            <a:r>
+              <a:t>1つ目は「理解する」。建設業の特殊性は本当に特殊なのか。今日見てきた通り、多くは業界共通の課題です。自社だけの問題だと思っていたことが、実は他の建設会社でも同じように起きているのです。</a:t>
+            </a:r>
+          </a:p>
+          <a:p>
+            <a:r>
+              <a:t>2つ目は「標準化する」。テンプレート、設定変更、BIツールの活用で、カスタマイズを最小限に抑えられます。設定で対応、運用で対応、最後の手段としてアドオンで対応。この3段階の考え方を忘れないでください。</a:t>
+            </a:r>
+          </a:p>
+          <a:p>
+            <a:r>
+              <a:t>3つ目は「提案する」。カスタマイズありきではない、新しいシステム導入の形を提案していきましょう。業務を変える選択肢も含めた、より良い解決策を提示することが大切です。</a:t>
+            </a:r>
+          </a:p>
+          <a:p>
+            <a:r>
+              <a:t>「うちは特殊だから」を「標準化で解決できる」に変える。これがITコンサルタントの真の価値です。</a:t>
+            </a:r>
+          </a:p>
+        </p:txBody>
+      </p:sp>
+      <p:sp>
+        <p:nvSpPr>
+          <p:cNvPr id="4" name="Slide Number Placeholder 3"/>
+          <p:cNvSpPr>
+            <a:spLocks noGrp="1"/>
+          </p:cNvSpPr>
+          <p:nvPr>
+            <p:ph type="sldNum" idx="5" sz="quarter"/>
+          </p:nvPr>
+        </p:nvSpPr>
+        <p:spPr/>
+      </p:sp>
+    </p:spTree>
+  </p:cSld>
+  <p:clrMapOvr>
+    <a:masterClrMapping/>
+  </p:clrMapOvr>
+</p:notes>
+</file>
+
+<file path=ppt/notesSlides/notesSlide2.xml><?xml version="1.0" encoding="utf-8"?>
+<p:notes xmlns:a="http://schemas.openxmlformats.org/drawingml/2006/main" xmlns:p="http://schemas.openxmlformats.org/presentationml/2006/main" xmlns:r="http://schemas.openxmlformats.org/officeDocument/2006/relationships">
+  <p:cSld>
+    <p:spTree>
+      <p:nvGrpSpPr>
+        <p:cNvPr id="1" name=""/>
+        <p:cNvGrpSpPr/>
+        <p:nvPr/>
+      </p:nvGrpSpPr>
+      <p:grpSpPr>
+        <a:xfrm>
+          <a:off x="0" y="0"/>
+          <a:ext cx="0" cy="0"/>
+          <a:chOff x="0" y="0"/>
+          <a:chExt cx="0" cy="0"/>
+        </a:xfrm>
+      </p:grpSpPr>
+      <p:sp>
+        <p:nvSpPr>
+          <p:cNvPr id="2" name="Slide Image Placeholder 1"/>
+          <p:cNvSpPr>
+            <a:spLocks noGrp="1"/>
+          </p:cNvSpPr>
+          <p:nvPr>
+            <p:ph type="sldImg" idx="2"/>
+          </p:nvPr>
+        </p:nvSpPr>
+        <p:spPr/>
+      </p:sp>
+      <p:sp>
+        <p:nvSpPr>
+          <p:cNvPr id="3" name="Notes Placeholder 2"/>
+          <p:cNvSpPr>
+            <a:spLocks noGrp="1"/>
+          </p:cNvSpPr>
+          <p:nvPr>
+            <p:ph type="body" idx="3" sz="quarter"/>
+          </p:nvPr>
+        </p:nvSpPr>
+        <p:spPr/>
+        <p:txBody>
+          <a:bodyPr/>
+          <a:lstStyle/>
+          <a:p>
+            <a:r>
+              <a:t>本日の勉強会の目的は大きく4つあります。</a:t>
+            </a:r>
+          </a:p>
+          <a:p>
+            <a:r>
+              <a:t>まず、カスタマイズ地獄とは何か。なぜ建設業でカスタマイズが多発するのかを理解しましょう。</a:t>
+            </a:r>
+          </a:p>
+          <a:p>
+            <a:r>
+              <a:t>次に、カスタマイズが集中する8つの業務領域を把握します。原価管理から帳票まで、具体的に見ていきます。</a:t>
+            </a:r>
+          </a:p>
+          <a:p>
+            <a:r>
+              <a:t>そして、カスタマイズに頼らない標準化の考え方を学びます。</a:t>
+            </a:r>
+          </a:p>
+          <a:p>
+            <a:r>
+              <a:t>最後に、明日から自社の業務で何ができるかを考えていただきます。</a:t>
+            </a:r>
+          </a:p>
+          <a:p>
+            <a:r>
+              <a:t>右側に今日のゴールを書いています。「うちは特殊だから」という発想を「標準化で解決できる」に変えること。この発想の転換が最大の目標です。</a:t>
+            </a:r>
+          </a:p>
+        </p:txBody>
+      </p:sp>
+      <p:sp>
+        <p:nvSpPr>
+          <p:cNvPr id="4" name="Slide Number Placeholder 3"/>
+          <p:cNvSpPr>
+            <a:spLocks noGrp="1"/>
+          </p:cNvSpPr>
+          <p:nvPr>
+            <p:ph type="sldNum" idx="5" sz="quarter"/>
+          </p:nvPr>
+        </p:nvSpPr>
+        <p:spPr/>
+      </p:sp>
+    </p:spTree>
+  </p:cSld>
+  <p:clrMapOvr>
+    <a:masterClrMapping/>
+  </p:clrMapOvr>
+</p:notes>
+</file>
+
+<file path=ppt/notesSlides/notesSlide20.xml><?xml version="1.0" encoding="utf-8"?>
+<p:notes xmlns:a="http://schemas.openxmlformats.org/drawingml/2006/main" xmlns:p="http://schemas.openxmlformats.org/presentationml/2006/main" xmlns:r="http://schemas.openxmlformats.org/officeDocument/2006/relationships">
+  <p:cSld>
+    <p:spTree>
+      <p:nvGrpSpPr>
+        <p:cNvPr id="1" name=""/>
+        <p:cNvGrpSpPr/>
+        <p:nvPr/>
+      </p:nvGrpSpPr>
+      <p:grpSpPr>
+        <a:xfrm>
+          <a:off x="0" y="0"/>
+          <a:ext cx="0" cy="0"/>
+          <a:chOff x="0" y="0"/>
+          <a:chExt cx="0" cy="0"/>
+        </a:xfrm>
+      </p:grpSpPr>
+      <p:sp>
+        <p:nvSpPr>
+          <p:cNvPr id="2" name="Slide Image Placeholder 1"/>
+          <p:cNvSpPr>
+            <a:spLocks noGrp="1"/>
+          </p:cNvSpPr>
+          <p:nvPr>
+            <p:ph type="sldImg" idx="2"/>
+          </p:nvPr>
+        </p:nvSpPr>
+        <p:spPr/>
+      </p:sp>
+      <p:sp>
+        <p:nvSpPr>
+          <p:cNvPr id="3" name="Notes Placeholder 2"/>
+          <p:cNvSpPr>
+            <a:spLocks noGrp="1"/>
+          </p:cNvSpPr>
+          <p:nvPr>
+            <p:ph type="body" idx="3" sz="quarter"/>
+          </p:nvPr>
+        </p:nvSpPr>
+        <p:spPr/>
+        <p:txBody>
+          <a:bodyPr/>
+          <a:lstStyle/>
+          <a:p>
+            <a:r>
+              <a:t>以上で本日の勉強会は終了です。ご清聴ありがとうございました。</a:t>
+            </a:r>
+          </a:p>
+          <a:p>
+            <a:r>
+              <a:t>今日お伝えしたかったのは、建設業のシステムリプレースにおいて、カスタマイズは避けられないものではなく、戦略的に減らせるものだということです。</a:t>
+            </a:r>
+          </a:p>
+          <a:p>
+            <a:r>
+              <a:t>明日からの業務で、「これは本当にカスタマイズが必要だろうか」「標準機能で代替できないだろうか」と一度立ち止まって考えていただければ幸いです。</a:t>
+            </a:r>
+          </a:p>
+          <a:p>
+            <a:r>
+              <a:t>ご質問やご相談がありましたら、お気軽にお申し付けください。</a:t>
+            </a:r>
+          </a:p>
+          <a:p>
+            <a:r>
+              <a:t>Harmonic Insightは、建設業DXの推進を、皆さんと共に歩んでまいります。</a:t>
+            </a:r>
+          </a:p>
+          <a:p>
+            <a:r>
+              <a:t>本日はありがとうございました。</a:t>
+            </a:r>
+          </a:p>
+        </p:txBody>
+      </p:sp>
+      <p:sp>
+        <p:nvSpPr>
+          <p:cNvPr id="4" name="Slide Number Placeholder 3"/>
+          <p:cNvSpPr>
+            <a:spLocks noGrp="1"/>
+          </p:cNvSpPr>
+          <p:nvPr>
+            <p:ph type="sldNum" idx="5" sz="quarter"/>
+          </p:nvPr>
+        </p:nvSpPr>
+        <p:spPr/>
+      </p:sp>
+    </p:spTree>
+  </p:cSld>
+  <p:clrMapOvr>
+    <a:masterClrMapping/>
+  </p:clrMapOvr>
+</p:notes>
+</file>
+
+<file path=ppt/notesSlides/notesSlide3.xml><?xml version="1.0" encoding="utf-8"?>
+<p:notes xmlns:a="http://schemas.openxmlformats.org/drawingml/2006/main" xmlns:p="http://schemas.openxmlformats.org/presentationml/2006/main" xmlns:r="http://schemas.openxmlformats.org/officeDocument/2006/relationships">
+  <p:cSld>
+    <p:spTree>
+      <p:nvGrpSpPr>
+        <p:cNvPr id="1" name=""/>
+        <p:cNvGrpSpPr/>
+        <p:nvPr/>
+      </p:nvGrpSpPr>
+      <p:grpSpPr>
+        <a:xfrm>
+          <a:off x="0" y="0"/>
+          <a:ext cx="0" cy="0"/>
+          <a:chOff x="0" y="0"/>
+          <a:chExt cx="0" cy="0"/>
+        </a:xfrm>
+      </p:grpSpPr>
+      <p:sp>
+        <p:nvSpPr>
+          <p:cNvPr id="2" name="Slide Image Placeholder 1"/>
+          <p:cNvSpPr>
+            <a:spLocks noGrp="1"/>
+          </p:cNvSpPr>
+          <p:nvPr>
+            <p:ph type="sldImg" idx="2"/>
+          </p:nvPr>
+        </p:nvSpPr>
+        <p:spPr/>
+      </p:sp>
+      <p:sp>
+        <p:nvSpPr>
+          <p:cNvPr id="3" name="Notes Placeholder 2"/>
+          <p:cNvSpPr>
+            <a:spLocks noGrp="1"/>
+          </p:cNvSpPr>
+          <p:nvPr>
+            <p:ph type="body" idx="3" sz="quarter"/>
+          </p:nvPr>
+        </p:nvSpPr>
+        <p:spPr/>
+        <p:txBody>
+          <a:bodyPr/>
+          <a:lstStyle/>
+          <a:p>
+            <a:r>
+              <a:t>なぜ建設業はカスタマイズ地獄に陥るのか。その悪循環の構造を見てみましょう。</a:t>
+            </a:r>
+          </a:p>
+          <a:p>
+            <a:r>
+              <a:t>まず、パッケージシステムを導入します。しかしすぐに「うちは特殊だ」という声が現場から続出します。</a:t>
+            </a:r>
+          </a:p>
+          <a:p>
+            <a:r>
+              <a:t>すると大量のカスタマイズ要求が発生し、費用と時間が大幅に超過。</a:t>
+            </a:r>
+          </a:p>
+          <a:p>
+            <a:r>
+              <a:t>結果として、個別開発と変わらないシステムが出来上がり、次のリプレースでまた同じ問題が繰り返される。</a:t>
+            </a:r>
+          </a:p>
+          <a:p>
+            <a:r>
+              <a:t>この悪循環を断ち切るのが「標準化戦略」です。</a:t>
+            </a:r>
+          </a:p>
+          <a:p>
+            <a:r>
+              <a:t>大切なのは、「うちは特殊」と感じるその業務が、実は業界全体で共通の課題であるケースが非常に多いということ。</a:t>
+            </a:r>
+          </a:p>
+          <a:p>
+            <a:r>
+              <a:t>それを今日の勉強会で実感していただきたいと思います。</a:t>
+            </a:r>
+          </a:p>
+        </p:txBody>
+      </p:sp>
+      <p:sp>
+        <p:nvSpPr>
+          <p:cNvPr id="4" name="Slide Number Placeholder 3"/>
+          <p:cNvSpPr>
+            <a:spLocks noGrp="1"/>
+          </p:cNvSpPr>
+          <p:nvPr>
+            <p:ph type="sldNum" idx="5" sz="quarter"/>
+          </p:nvPr>
+        </p:nvSpPr>
+        <p:spPr/>
+      </p:sp>
+    </p:spTree>
+  </p:cSld>
+  <p:clrMapOvr>
+    <a:masterClrMapping/>
+  </p:clrMapOvr>
+</p:notes>
+</file>
+
+<file path=ppt/notesSlides/notesSlide4.xml><?xml version="1.0" encoding="utf-8"?>
+<p:notes xmlns:a="http://schemas.openxmlformats.org/drawingml/2006/main" xmlns:p="http://schemas.openxmlformats.org/presentationml/2006/main" xmlns:r="http://schemas.openxmlformats.org/officeDocument/2006/relationships">
+  <p:cSld>
+    <p:spTree>
+      <p:nvGrpSpPr>
+        <p:cNvPr id="1" name=""/>
+        <p:cNvGrpSpPr/>
+        <p:nvPr/>
+      </p:nvGrpSpPr>
+      <p:grpSpPr>
+        <a:xfrm>
+          <a:off x="0" y="0"/>
+          <a:ext cx="0" cy="0"/>
+          <a:chOff x="0" y="0"/>
+          <a:chExt cx="0" cy="0"/>
+        </a:xfrm>
+      </p:grpSpPr>
+      <p:sp>
+        <p:nvSpPr>
+          <p:cNvPr id="2" name="Slide Image Placeholder 1"/>
+          <p:cNvSpPr>
+            <a:spLocks noGrp="1"/>
+          </p:cNvSpPr>
+          <p:nvPr>
+            <p:ph type="sldImg" idx="2"/>
+          </p:nvPr>
+        </p:nvSpPr>
+        <p:spPr/>
+      </p:sp>
+      <p:sp>
+        <p:nvSpPr>
+          <p:cNvPr id="3" name="Notes Placeholder 2"/>
+          <p:cNvSpPr>
+            <a:spLocks noGrp="1"/>
+          </p:cNvSpPr>
+          <p:nvPr>
+            <p:ph type="body" idx="3" sz="quarter"/>
+          </p:nvPr>
+        </p:nvSpPr>
+        <p:spPr/>
+        <p:txBody>
+          <a:bodyPr/>
+          <a:lstStyle/>
+          <a:p>
+            <a:r>
+              <a:t>建設業にはシステム標準化を難しくする6つの特有の複雑性があります。</a:t>
+            </a:r>
+          </a:p>
+          <a:p>
+            <a:r>
+              <a:t>1つ目は工事の個別性。同じ工事は二つとない一品生産の世界です。工場のように同じ製品を大量生産するのとは根本的に違います。</a:t>
+            </a:r>
+          </a:p>
+          <a:p>
+            <a:r>
+              <a:t>2つ目は現場と本社の壁。地理的・時間的な隔たりがあり、情報共有が困難です。</a:t>
+            </a:r>
+          </a:p>
+          <a:p>
+            <a:r>
+              <a:t>3つ目は多様な契約形態。請負、単価、委託など、複雑な決済ルールが存在します。</a:t>
+            </a:r>
+          </a:p>
+          <a:p>
+            <a:r>
+              <a:t>4つ目は法令・管理要件。建設業法や下請法など、厳格な法令対応が求められます。</a:t>
+            </a:r>
+          </a:p>
+          <a:p>
+            <a:r>
+              <a:t>5つ目は業務の属人化。ベテランの経験と勘に頼っており、暗黙知を形式知にするのが困難です。</a:t>
+            </a:r>
+          </a:p>
+          <a:p>
+            <a:r>
+              <a:t>6つ目は会計の複雑化。進行基準と完成基準の使い分け、未成工事の管理など、独特の会計処理があります。</a:t>
+            </a:r>
+          </a:p>
+          <a:p>
+            <a:r>
+              <a:t>これらの特性が、標準機能では対応しきれないカスタマイズ要求を生み出しているのです。</a:t>
+            </a:r>
+          </a:p>
+        </p:txBody>
+      </p:sp>
+      <p:sp>
+        <p:nvSpPr>
+          <p:cNvPr id="4" name="Slide Number Placeholder 3"/>
+          <p:cNvSpPr>
+            <a:spLocks noGrp="1"/>
+          </p:cNvSpPr>
+          <p:nvPr>
+            <p:ph type="sldNum" idx="5" sz="quarter"/>
+          </p:nvPr>
+        </p:nvSpPr>
+        <p:spPr/>
+      </p:sp>
+    </p:spTree>
+  </p:cSld>
+  <p:clrMapOvr>
+    <a:masterClrMapping/>
+  </p:clrMapOvr>
+</p:notes>
+</file>
+
+<file path=ppt/notesSlides/notesSlide5.xml><?xml version="1.0" encoding="utf-8"?>
+<p:notes xmlns:a="http://schemas.openxmlformats.org/drawingml/2006/main" xmlns:p="http://schemas.openxmlformats.org/presentationml/2006/main" xmlns:r="http://schemas.openxmlformats.org/officeDocument/2006/relationships">
+  <p:cSld>
+    <p:spTree>
+      <p:nvGrpSpPr>
+        <p:cNvPr id="1" name=""/>
+        <p:cNvGrpSpPr/>
+        <p:nvPr/>
+      </p:nvGrpSpPr>
+      <p:grpSpPr>
+        <a:xfrm>
+          <a:off x="0" y="0"/>
+          <a:ext cx="0" cy="0"/>
+          <a:chOff x="0" y="0"/>
+          <a:chExt cx="0" cy="0"/>
+        </a:xfrm>
+      </p:grpSpPr>
+      <p:sp>
+        <p:nvSpPr>
+          <p:cNvPr id="2" name="Slide Image Placeholder 1"/>
+          <p:cNvSpPr>
+            <a:spLocks noGrp="1"/>
+          </p:cNvSpPr>
+          <p:nvPr>
+            <p:ph type="sldImg" idx="2"/>
+          </p:nvPr>
+        </p:nvSpPr>
+        <p:spPr/>
+      </p:sp>
+      <p:sp>
+        <p:nvSpPr>
+          <p:cNvPr id="3" name="Notes Placeholder 2"/>
+          <p:cNvSpPr>
+            <a:spLocks noGrp="1"/>
+          </p:cNvSpPr>
+          <p:nvPr>
+            <p:ph type="body" idx="3" sz="quarter"/>
+          </p:nvPr>
+        </p:nvSpPr>
+        <p:spPr/>
+        <p:txBody>
+          <a:bodyPr/>
+          <a:lstStyle/>
+          <a:p>
+            <a:r>
+              <a:t>ここからが本日のメインコンテンツです。</a:t>
+            </a:r>
+          </a:p>
+          <a:p>
+            <a:r>
+              <a:t>カスタマイズが多発する8つの業務領域を、一つずつ見ていきます。</a:t>
+            </a:r>
+          </a:p>
+          <a:p>
+            <a:r>
+              <a:t>各領域の「よくある課題」と「標準化の方向性」を、できるだけ分かりやすく解説します。</a:t>
+            </a:r>
+          </a:p>
+          <a:p>
+            <a:r>
+              <a:t>業務担当者の皆さんにとって、「あるある」と感じる内容が多いと思います。</a:t>
+            </a:r>
+          </a:p>
+          <a:p>
+            <a:r>
+              <a:t>ぜひ自社の状況と照らし合わせながら聞いてください。</a:t>
+            </a:r>
+          </a:p>
+        </p:txBody>
+      </p:sp>
+      <p:sp>
+        <p:nvSpPr>
+          <p:cNvPr id="4" name="Slide Number Placeholder 3"/>
+          <p:cNvSpPr>
+            <a:spLocks noGrp="1"/>
+          </p:cNvSpPr>
+          <p:nvPr>
+            <p:ph type="sldNum" idx="5" sz="quarter"/>
+          </p:nvPr>
+        </p:nvSpPr>
+        <p:spPr/>
+      </p:sp>
+    </p:spTree>
+  </p:cSld>
+  <p:clrMapOvr>
+    <a:masterClrMapping/>
+  </p:clrMapOvr>
+</p:notes>
+</file>
+
+<file path=ppt/notesSlides/notesSlide6.xml><?xml version="1.0" encoding="utf-8"?>
+<p:notes xmlns:a="http://schemas.openxmlformats.org/drawingml/2006/main" xmlns:p="http://schemas.openxmlformats.org/presentationml/2006/main" xmlns:r="http://schemas.openxmlformats.org/officeDocument/2006/relationships">
+  <p:cSld>
+    <p:spTree>
+      <p:nvGrpSpPr>
+        <p:cNvPr id="1" name=""/>
+        <p:cNvGrpSpPr/>
+        <p:nvPr/>
+      </p:nvGrpSpPr>
+      <p:grpSpPr>
+        <a:xfrm>
+          <a:off x="0" y="0"/>
+          <a:ext cx="0" cy="0"/>
+          <a:chOff x="0" y="0"/>
+          <a:chExt cx="0" cy="0"/>
+        </a:xfrm>
+      </p:grpSpPr>
+      <p:sp>
+        <p:nvSpPr>
+          <p:cNvPr id="2" name="Slide Image Placeholder 1"/>
+          <p:cNvSpPr>
+            <a:spLocks noGrp="1"/>
+          </p:cNvSpPr>
+          <p:nvPr>
+            <p:ph type="sldImg" idx="2"/>
+          </p:nvPr>
+        </p:nvSpPr>
+        <p:spPr/>
+      </p:sp>
+      <p:sp>
+        <p:nvSpPr>
+          <p:cNvPr id="3" name="Notes Placeholder 2"/>
+          <p:cNvSpPr>
+            <a:spLocks noGrp="1"/>
+          </p:cNvSpPr>
+          <p:nvPr>
+            <p:ph type="body" idx="3" sz="quarter"/>
+          </p:nvPr>
+        </p:nvSpPr>
+        <p:spPr/>
+        <p:txBody>
+          <a:bodyPr/>
+          <a:lstStyle/>
+          <a:p>
+            <a:r>
+              <a:t>カスタマイズが多発する8つの業務領域の全体マップです。</a:t>
+            </a:r>
+          </a:p>
+          <a:p>
+            <a:r>
+              <a:t>第1が原価管理・工事採算。これが最重要領域で、カスタマイズ要望が最も多い分野です。</a:t>
+            </a:r>
+          </a:p>
+          <a:p>
+            <a:r>
+              <a:t>第2が契約・請求・入金管理。複雑な取引形態への対応が求められます。</a:t>
+            </a:r>
+          </a:p>
+          <a:p>
+            <a:r>
+              <a:t>第3が経費精算・現場管理。日常的に頻出する課題です。</a:t>
+            </a:r>
+          </a:p>
+          <a:p>
+            <a:r>
+              <a:t>第4が購買・在庫・資材管理。現場に密着した処理が必要です。</a:t>
+            </a:r>
+          </a:p>
+          <a:p>
+            <a:r>
+              <a:t>第5がワークフロー・承認プロセス。全社横断的な課題です。</a:t>
+            </a:r>
+          </a:p>
+          <a:p>
+            <a:r>
+              <a:t>第6が出面管理・労務管理。法令関連の要件が厳しい分野です。</a:t>
+            </a:r>
+          </a:p>
+          <a:p>
+            <a:r>
+              <a:t>第7が個別帳票・レポート。要望が非常に多い領域です。</a:t>
+            </a:r>
+          </a:p>
+          <a:p>
+            <a:r>
+              <a:t>そして第8が標準化戦略。これが解決策となります。</a:t>
+            </a:r>
+          </a:p>
+          <a:p>
+            <a:r>
+              <a:t>では、第1章から順に見ていきましょう。</a:t>
+            </a:r>
+          </a:p>
+        </p:txBody>
+      </p:sp>
+      <p:sp>
+        <p:nvSpPr>
+          <p:cNvPr id="4" name="Slide Number Placeholder 3"/>
+          <p:cNvSpPr>
+            <a:spLocks noGrp="1"/>
+          </p:cNvSpPr>
+          <p:nvPr>
+            <p:ph type="sldNum" idx="5" sz="quarter"/>
+          </p:nvPr>
+        </p:nvSpPr>
+        <p:spPr/>
+      </p:sp>
+    </p:spTree>
+  </p:cSld>
+  <p:clrMapOvr>
+    <a:masterClrMapping/>
+  </p:clrMapOvr>
+</p:notes>
+</file>
+
+<file path=ppt/notesSlides/notesSlide7.xml><?xml version="1.0" encoding="utf-8"?>
+<p:notes xmlns:a="http://schemas.openxmlformats.org/drawingml/2006/main" xmlns:p="http://schemas.openxmlformats.org/presentationml/2006/main" xmlns:r="http://schemas.openxmlformats.org/officeDocument/2006/relationships">
+  <p:cSld>
+    <p:spTree>
+      <p:nvGrpSpPr>
+        <p:cNvPr id="1" name=""/>
+        <p:cNvGrpSpPr/>
+        <p:nvPr/>
+      </p:nvGrpSpPr>
+      <p:grpSpPr>
+        <a:xfrm>
+          <a:off x="0" y="0"/>
+          <a:ext cx="0" cy="0"/>
+          <a:chOff x="0" y="0"/>
+          <a:chExt cx="0" cy="0"/>
+        </a:xfrm>
+      </p:grpSpPr>
+      <p:sp>
+        <p:nvSpPr>
+          <p:cNvPr id="2" name="Slide Image Placeholder 1"/>
+          <p:cNvSpPr>
+            <a:spLocks noGrp="1"/>
+          </p:cNvSpPr>
+          <p:nvPr>
+            <p:ph type="sldImg" idx="2"/>
+          </p:nvPr>
+        </p:nvSpPr>
+        <p:spPr/>
+      </p:sp>
+      <p:sp>
+        <p:nvSpPr>
+          <p:cNvPr id="3" name="Notes Placeholder 2"/>
+          <p:cNvSpPr>
+            <a:spLocks noGrp="1"/>
+          </p:cNvSpPr>
+          <p:nvPr>
+            <p:ph type="body" idx="3" sz="quarter"/>
+          </p:nvPr>
+        </p:nvSpPr>
+        <p:spPr/>
+        <p:txBody>
+          <a:bodyPr/>
+          <a:lstStyle/>
+          <a:p>
+            <a:r>
+              <a:t>第1章、原価管理・工事採算管理です。建設業の生命線とも言える領域です。</a:t>
+            </a:r>
+          </a:p>
+          <a:p>
+            <a:r>
+              <a:t>左側に3つの主要な問題を挙げています。</a:t>
+            </a:r>
+          </a:p>
+          <a:p>
+            <a:r>
+              <a:t>まず実行予算管理。設計変更のたびにExcelを作り直し、予算残高をリアルタイムで見たいというニーズが強くあります。</a:t>
+            </a:r>
+          </a:p>
+          <a:p>
+            <a:r>
+              <a:t>次に共通費の配賦。間接費の按分ルールが複雑で、工事間で不公平感が生まれています。</a:t>
+            </a:r>
+          </a:p>
+          <a:p>
+            <a:r>
+              <a:t>そして工事進行基準。進捗率の計算方法が統一されず、収益認識が企業ごとにバラバラになっています。</a:t>
+            </a:r>
+          </a:p>
+          <a:p>
+            <a:r>
+              <a:t>右側に標準化の方向性を示しています。</a:t>
+            </a:r>
+          </a:p>
+          <a:p>
+            <a:r>
+              <a:t>業界標準の原価分類マスタをベースに企業独自の費目を追加できる仕組み、配賦パターンのテンプレート化、進捗率の自動計算ロジックを複数パターンから選択可能にすること。</a:t>
+            </a:r>
+          </a:p>
+          <a:p>
+            <a:r>
+              <a:t>こうした標準化により、カスタマイズを最小限に抑えられます。</a:t>
+            </a:r>
+          </a:p>
+        </p:txBody>
+      </p:sp>
+      <p:sp>
+        <p:nvSpPr>
+          <p:cNvPr id="4" name="Slide Number Placeholder 3"/>
+          <p:cNvSpPr>
+            <a:spLocks noGrp="1"/>
+          </p:cNvSpPr>
+          <p:nvPr>
+            <p:ph type="sldNum" idx="5" sz="quarter"/>
+          </p:nvPr>
+        </p:nvSpPr>
+        <p:spPr/>
+      </p:sp>
+    </p:spTree>
+  </p:cSld>
+  <p:clrMapOvr>
+    <a:masterClrMapping/>
+  </p:clrMapOvr>
+</p:notes>
+</file>
+
+<file path=ppt/notesSlides/notesSlide8.xml><?xml version="1.0" encoding="utf-8"?>
+<p:notes xmlns:a="http://schemas.openxmlformats.org/drawingml/2006/main" xmlns:p="http://schemas.openxmlformats.org/presentationml/2006/main" xmlns:r="http://schemas.openxmlformats.org/officeDocument/2006/relationships">
+  <p:cSld>
+    <p:spTree>
+      <p:nvGrpSpPr>
+        <p:cNvPr id="1" name=""/>
+        <p:cNvGrpSpPr/>
+        <p:nvPr/>
+      </p:nvGrpSpPr>
+      <p:grpSpPr>
+        <a:xfrm>
+          <a:off x="0" y="0"/>
+          <a:ext cx="0" cy="0"/>
+          <a:chOff x="0" y="0"/>
+          <a:chExt cx="0" cy="0"/>
+        </a:xfrm>
+      </p:grpSpPr>
+      <p:sp>
+        <p:nvSpPr>
+          <p:cNvPr id="2" name="Slide Image Placeholder 1"/>
+          <p:cNvSpPr>
+            <a:spLocks noGrp="1"/>
+          </p:cNvSpPr>
+          <p:nvPr>
+            <p:ph type="sldImg" idx="2"/>
+          </p:nvPr>
+        </p:nvSpPr>
+        <p:spPr/>
+      </p:sp>
+      <p:sp>
+        <p:nvSpPr>
+          <p:cNvPr id="3" name="Notes Placeholder 2"/>
+          <p:cNvSpPr>
+            <a:spLocks noGrp="1"/>
+          </p:cNvSpPr>
+          <p:nvPr>
+            <p:ph type="body" idx="3" sz="quarter"/>
+          </p:nvPr>
+        </p:nvSpPr>
+        <p:spPr/>
+        <p:txBody>
+          <a:bodyPr/>
+          <a:lstStyle/>
+          <a:p>
+            <a:r>
+              <a:t>実行予算管理のBefore/Afterを図解しています。</a:t>
+            </a:r>
+          </a:p>
+          <a:p>
+            <a:r>
+              <a:t>左のBefore。設計変更が発生すると、まずExcelを作り直し、そして本社に電話で確認。時間がかかり、ミスが起きやすく、属人的な作業です。</a:t>
+            </a:r>
+          </a:p>
+          <a:p>
+            <a:r>
+              <a:t>右のAfter。設計変更をシステムに入力すると、予算が自動で再計算され、タブレットで残高をその場で確認できます。リアルタイムで自動化され、誰でも操作できる世界です。</a:t>
+            </a:r>
+          </a:p>
+          <a:p>
+            <a:r>
+              <a:t>下に現場の声を載せています。「設計変更のたびにExcelを作り直すのは時間がかかりすぎる」「タブレットで予算残高が見られれば無駄な発注も減るはずだ」。</a:t>
+            </a:r>
+          </a:p>
+          <a:p>
+            <a:r>
+              <a:t>こうした声は、多くの建設会社で共通して聞かれるものです。つまり、カスタマイズしなくても標準機能で対応できる可能性が高い領域なのです。</a:t>
+            </a:r>
+          </a:p>
+        </p:txBody>
+      </p:sp>
+      <p:sp>
+        <p:nvSpPr>
+          <p:cNvPr id="4" name="Slide Number Placeholder 3"/>
+          <p:cNvSpPr>
+            <a:spLocks noGrp="1"/>
+          </p:cNvSpPr>
+          <p:nvPr>
+            <p:ph type="sldNum" idx="5" sz="quarter"/>
+          </p:nvPr>
+        </p:nvSpPr>
+        <p:spPr/>
+      </p:sp>
+    </p:spTree>
+  </p:cSld>
+  <p:clrMapOvr>
+    <a:masterClrMapping/>
+  </p:clrMapOvr>
+</p:notes>
+</file>
+
+<file path=ppt/notesSlides/notesSlide9.xml><?xml version="1.0" encoding="utf-8"?>
+<p:notes xmlns:a="http://schemas.openxmlformats.org/drawingml/2006/main" xmlns:p="http://schemas.openxmlformats.org/presentationml/2006/main" xmlns:r="http://schemas.openxmlformats.org/officeDocument/2006/relationships">
+  <p:cSld>
+    <p:spTree>
+      <p:nvGrpSpPr>
+        <p:cNvPr id="1" name=""/>
+        <p:cNvGrpSpPr/>
+        <p:nvPr/>
+      </p:nvGrpSpPr>
+      <p:grpSpPr>
+        <a:xfrm>
+          <a:off x="0" y="0"/>
+          <a:ext cx="0" cy="0"/>
+          <a:chOff x="0" y="0"/>
+          <a:chExt cx="0" cy="0"/>
+        </a:xfrm>
+      </p:grpSpPr>
+      <p:sp>
+        <p:nvSpPr>
+          <p:cNvPr id="2" name="Slide Image Placeholder 1"/>
+          <p:cNvSpPr>
+            <a:spLocks noGrp="1"/>
+          </p:cNvSpPr>
+          <p:nvPr>
+            <p:ph type="sldImg" idx="2"/>
+          </p:nvPr>
+        </p:nvSpPr>
+        <p:spPr/>
+      </p:sp>
+      <p:sp>
+        <p:nvSpPr>
+          <p:cNvPr id="3" name="Notes Placeholder 2"/>
+          <p:cNvSpPr>
+            <a:spLocks noGrp="1"/>
+          </p:cNvSpPr>
+          <p:nvPr>
+            <p:ph type="body" idx="3" sz="quarter"/>
+          </p:nvPr>
+        </p:nvSpPr>
+        <p:spPr/>
+        <p:txBody>
+          <a:bodyPr/>
+          <a:lstStyle/>
+          <a:p>
+            <a:r>
+              <a:t>第2章、契約・請求・入金管理です。</a:t>
+            </a:r>
+          </a:p>
+          <a:p>
+            <a:r>
+              <a:t>建設業には請負契約、単価契約、業務委託と多様な契約形態があり、それぞれ支払方法も異なります。</a:t>
+            </a:r>
+          </a:p>
+          <a:p>
+            <a:r>
+              <a:t>請負契約は出来高払いや完成払いですが、出来高の計算方法が企業ごとに異なるのが課題です。</a:t>
+            </a:r>
+          </a:p>
+          <a:p>
+            <a:r>
+              <a:t>単価契約は月次精算ですが、単価改定や追加数量の処理が複雑になります。</a:t>
+            </a:r>
+          </a:p>
+          <a:p>
+            <a:r>
+              <a:t>業務委託は月末締め翌月払いですが、労務実績との突合が手作業で行われています。</a:t>
+            </a:r>
+          </a:p>
+          <a:p>
+            <a:r>
+              <a:t>左下の重要ポイントとして、建設業法・下請法への対応、建退共の証紙管理やCCUSとの連携も必要です。</a:t>
+            </a:r>
+          </a:p>
+          <a:p>
+            <a:r>
+              <a:t>右下の標準化の方向性としては、契約パターンマスタで類型化して選択式にすること、出来高計算テンプレートの標準提供、そして法令チェック機能の標準実装が有効です。</a:t>
+            </a:r>
+          </a:p>
+        </p:txBody>
+      </p:sp>
+      <p:sp>
+        <p:nvSpPr>
+          <p:cNvPr id="4" name="Slide Number Placeholder 3"/>
+          <p:cNvSpPr>
+            <a:spLocks noGrp="1"/>
+          </p:cNvSpPr>
+          <p:nvPr>
+            <p:ph type="sldNum" idx="5" sz="quarter"/>
+          </p:nvPr>
+        </p:nvSpPr>
+        <p:spPr/>
+      </p:sp>
+    </p:spTree>
+  </p:cSld>
+  <p:clrMapOvr>
+    <a:masterClrMapping/>
+  </p:clrMapOvr>
+</p:notes>
 </file>
 
 <file path=ppt/slideLayouts/slideLayout1.xml><?xml version="1.0" encoding="utf-8"?>
@@ -26111,4 +28426,324 @@
   </a:objectDefaults>
   <a:extraClrSchemeLst/>
 </a:theme>
+</file>
+
+<file path=ppt/theme/theme2.xml><?xml version="1.0" encoding="utf-8"?>
+<a:theme xmlns:a="http://schemas.openxmlformats.org/drawingml/2006/main" name="Office Theme">
+  <a:themeElements>
+    <a:clrScheme name="Office">
+      <a:dk1>
+        <a:sysClr val="windowText" lastClr="000000"/>
+      </a:dk1>
+      <a:lt1>
+        <a:sysClr val="window" lastClr="FFFFFF"/>
+      </a:lt1>
+      <a:dk2>
+        <a:srgbClr val="1F497D"/>
+      </a:dk2>
+      <a:lt2>
+        <a:srgbClr val="EEECE1"/>
+      </a:lt2>
+      <a:accent1>
+        <a:srgbClr val="4F81BD"/>
+      </a:accent1>
+      <a:accent2>
+        <a:srgbClr val="C0504D"/>
+      </a:accent2>
+      <a:accent3>
+        <a:srgbClr val="9BBB59"/>
+      </a:accent3>
+      <a:accent4>
+        <a:srgbClr val="8064A2"/>
+      </a:accent4>
+      <a:accent5>
+        <a:srgbClr val="4BACC6"/>
+      </a:accent5>
+      <a:accent6>
+        <a:srgbClr val="F79646"/>
+      </a:accent6>
+      <a:hlink>
+        <a:srgbClr val="0000FF"/>
+      </a:hlink>
+      <a:folHlink>
+        <a:srgbClr val="800080"/>
+      </a:folHlink>
+    </a:clrScheme>
+    <a:fontScheme name="Office">
+      <a:majorFont>
+        <a:latin typeface="Calibri"/>
+        <a:ea typeface=""/>
+        <a:cs typeface=""/>
+        <a:font script="Jpan" typeface="ＭＳ Ｐゴシック"/>
+        <a:font script="Hang" typeface="맑은 고딕"/>
+        <a:font script="Hans" typeface="宋体"/>
+        <a:font script="Hant" typeface="新細明體"/>
+        <a:font script="Arab" typeface="Times New Roman"/>
+        <a:font script="Hebr" typeface="Times New Roman"/>
+        <a:font script="Thai" typeface="Angsana New"/>
+        <a:font script="Ethi" typeface="Nyala"/>
+        <a:font script="Beng" typeface="Vrinda"/>
+        <a:font script="Gujr" typeface="Shruti"/>
+        <a:font script="Khmr" typeface="MoolBoran"/>
+        <a:font script="Knda" typeface="Tunga"/>
+        <a:font script="Guru" typeface="Raavi"/>
+        <a:font script="Cans" typeface="Euphemia"/>
+        <a:font script="Cher" typeface="Plantagenet Cherokee"/>
+        <a:font script="Yiii" typeface="Microsoft Yi Baiti"/>
+        <a:font script="Tibt" typeface="Microsoft Himalaya"/>
+        <a:font script="Thaa" typeface="MV Boli"/>
+        <a:font script="Deva" typeface="Mangal"/>
+        <a:font script="Telu" typeface="Gautami"/>
+        <a:font script="Taml" typeface="Latha"/>
+        <a:font script="Syrc" typeface="Estrangelo Edessa"/>
+        <a:font script="Orya" typeface="Kalinga"/>
+        <a:font script="Mlym" typeface="Kartika"/>
+        <a:font script="Laoo" typeface="DokChampa"/>
+        <a:font script="Sinh" typeface="Iskoola Pota"/>
+        <a:font script="Mong" typeface="Mongolian Baiti"/>
+        <a:font script="Viet" typeface="Times New Roman"/>
+        <a:font script="Uigh" typeface="Microsoft Uighur"/>
+        <a:font script="Geor" typeface="Sylfaen"/>
+      </a:majorFont>
+      <a:minorFont>
+        <a:latin typeface="Calibri"/>
+        <a:ea typeface=""/>
+        <a:cs typeface=""/>
+        <a:font script="Jpan" typeface="ＭＳ Ｐゴシック"/>
+        <a:font script="Hang" typeface="맑은 고딕"/>
+        <a:font script="Hans" typeface="宋体"/>
+        <a:font script="Hant" typeface="新細明體"/>
+        <a:font script="Arab" typeface="Arial"/>
+        <a:font script="Hebr" typeface="Arial"/>
+        <a:font script="Thai" typeface="Cordia New"/>
+        <a:font script="Ethi" typeface="Nyala"/>
+        <a:font script="Beng" typeface="Vrinda"/>
+        <a:font script="Gujr" typeface="Shruti"/>
+        <a:font script="Khmr" typeface="DaunPenh"/>
+        <a:font script="Knda" typeface="Tunga"/>
+        <a:font script="Guru" typeface="Raavi"/>
+        <a:font script="Cans" typeface="Euphemia"/>
+        <a:font script="Cher" typeface="Plantagenet Cherokee"/>
+        <a:font script="Yiii" typeface="Microsoft Yi Baiti"/>
+        <a:font script="Tibt" typeface="Microsoft Himalaya"/>
+        <a:font script="Thaa" typeface="MV Boli"/>
+        <a:font script="Deva" typeface="Mangal"/>
+        <a:font script="Telu" typeface="Gautami"/>
+        <a:font script="Taml" typeface="Latha"/>
+        <a:font script="Syrc" typeface="Estrangelo Edessa"/>
+        <a:font script="Orya" typeface="Kalinga"/>
+        <a:font script="Mlym" typeface="Kartika"/>
+        <a:font script="Laoo" typeface="DokChampa"/>
+        <a:font script="Sinh" typeface="Iskoola Pota"/>
+        <a:font script="Mong" typeface="Mongolian Baiti"/>
+        <a:font script="Viet" typeface="Arial"/>
+        <a:font script="Uigh" typeface="Microsoft Uighur"/>
+        <a:font script="Geor" typeface="Sylfaen"/>
+      </a:minorFont>
+    </a:fontScheme>
+    <a:fmtScheme name="Office">
+      <a:fillStyleLst>
+        <a:solidFill>
+          <a:schemeClr val="phClr"/>
+        </a:solidFill>
+        <a:gradFill rotWithShape="1">
+          <a:gsLst>
+            <a:gs pos="0">
+              <a:schemeClr val="phClr">
+                <a:tint val="50000"/>
+                <a:satMod val="300000"/>
+              </a:schemeClr>
+            </a:gs>
+            <a:gs pos="35000">
+              <a:schemeClr val="phClr">
+                <a:tint val="37000"/>
+                <a:satMod val="300000"/>
+              </a:schemeClr>
+            </a:gs>
+            <a:gs pos="100000">
+              <a:schemeClr val="phClr">
+                <a:tint val="15000"/>
+                <a:satMod val="350000"/>
+              </a:schemeClr>
+            </a:gs>
+          </a:gsLst>
+          <a:lin ang="16200000" scaled="1"/>
+        </a:gradFill>
+        <a:gradFill rotWithShape="1">
+          <a:gsLst>
+            <a:gs pos="0">
+              <a:schemeClr val="phClr">
+                <a:tint val="100000"/>
+                <a:shade val="100000"/>
+                <a:satMod val="130000"/>
+              </a:schemeClr>
+            </a:gs>
+            <a:gs pos="100000">
+              <a:schemeClr val="phClr">
+                <a:tint val="50000"/>
+                <a:shade val="100000"/>
+                <a:satMod val="350000"/>
+              </a:schemeClr>
+            </a:gs>
+          </a:gsLst>
+          <a:lin ang="16200000" scaled="0"/>
+        </a:gradFill>
+      </a:fillStyleLst>
+      <a:lnStyleLst>
+        <a:ln w="9525" cap="flat" cmpd="sng" algn="ctr">
+          <a:solidFill>
+            <a:schemeClr val="phClr">
+              <a:shade val="95000"/>
+              <a:satMod val="105000"/>
+            </a:schemeClr>
+          </a:solidFill>
+          <a:prstDash val="solid"/>
+        </a:ln>
+        <a:ln w="25400" cap="flat" cmpd="sng" algn="ctr">
+          <a:solidFill>
+            <a:schemeClr val="phClr"/>
+          </a:solidFill>
+          <a:prstDash val="solid"/>
+        </a:ln>
+        <a:ln w="38100" cap="flat" cmpd="sng" algn="ctr">
+          <a:solidFill>
+            <a:schemeClr val="phClr"/>
+          </a:solidFill>
+          <a:prstDash val="solid"/>
+        </a:ln>
+      </a:lnStyleLst>
+      <a:effectStyleLst>
+        <a:effectStyle>
+          <a:effectLst>
+            <a:outerShdw blurRad="40000" dist="20000" dir="5400000" rotWithShape="0">
+              <a:srgbClr val="000000">
+                <a:alpha val="38000"/>
+              </a:srgbClr>
+            </a:outerShdw>
+          </a:effectLst>
+        </a:effectStyle>
+        <a:effectStyle>
+          <a:effectLst>
+            <a:outerShdw blurRad="40000" dist="23000" dir="5400000" rotWithShape="0">
+              <a:srgbClr val="000000">
+                <a:alpha val="35000"/>
+              </a:srgbClr>
+            </a:outerShdw>
+          </a:effectLst>
+        </a:effectStyle>
+        <a:effectStyle>
+          <a:effectLst>
+            <a:outerShdw blurRad="40000" dist="23000" dir="5400000" rotWithShape="0">
+              <a:srgbClr val="000000">
+                <a:alpha val="35000"/>
+              </a:srgbClr>
+            </a:outerShdw>
+          </a:effectLst>
+          <a:scene3d>
+            <a:camera prst="orthographicFront">
+              <a:rot lat="0" lon="0" rev="0"/>
+            </a:camera>
+            <a:lightRig rig="threePt" dir="t">
+              <a:rot lat="0" lon="0" rev="1200000"/>
+            </a:lightRig>
+          </a:scene3d>
+          <a:sp3d>
+            <a:bevelT w="63500" h="25400"/>
+          </a:sp3d>
+        </a:effectStyle>
+      </a:effectStyleLst>
+      <a:bgFillStyleLst>
+        <a:solidFill>
+          <a:schemeClr val="phClr"/>
+        </a:solidFill>
+        <a:gradFill rotWithShape="1">
+          <a:gsLst>
+            <a:gs pos="0">
+              <a:schemeClr val="phClr">
+                <a:tint val="40000"/>
+                <a:satMod val="350000"/>
+              </a:schemeClr>
+            </a:gs>
+            <a:gs pos="40000">
+              <a:schemeClr val="phClr">
+                <a:tint val="45000"/>
+                <a:shade val="99000"/>
+                <a:satMod val="350000"/>
+              </a:schemeClr>
+            </a:gs>
+            <a:gs pos="100000">
+              <a:schemeClr val="phClr">
+                <a:shade val="20000"/>
+                <a:satMod val="255000"/>
+              </a:schemeClr>
+            </a:gs>
+          </a:gsLst>
+          <a:path path="circle">
+            <a:fillToRect l="50000" t="-80000" r="50000" b="180000"/>
+          </a:path>
+        </a:gradFill>
+        <a:gradFill rotWithShape="1">
+          <a:gsLst>
+            <a:gs pos="0">
+              <a:schemeClr val="phClr">
+                <a:tint val="80000"/>
+                <a:satMod val="300000"/>
+              </a:schemeClr>
+            </a:gs>
+            <a:gs pos="100000">
+              <a:schemeClr val="phClr">
+                <a:shade val="30000"/>
+                <a:satMod val="200000"/>
+              </a:schemeClr>
+            </a:gs>
+          </a:gsLst>
+          <a:path path="circle">
+            <a:fillToRect l="50000" t="50000" r="50000" b="50000"/>
+          </a:path>
+        </a:gradFill>
+      </a:bgFillStyleLst>
+    </a:fmtScheme>
+  </a:themeElements>
+  <a:objectDefaults>
+    <a:spDef>
+      <a:spPr/>
+      <a:bodyPr/>
+      <a:lstStyle/>
+      <a:style>
+        <a:lnRef idx="1">
+          <a:schemeClr val="accent1"/>
+        </a:lnRef>
+        <a:fillRef idx="3">
+          <a:schemeClr val="accent1"/>
+        </a:fillRef>
+        <a:effectRef idx="2">
+          <a:schemeClr val="accent1"/>
+        </a:effectRef>
+        <a:fontRef idx="minor">
+          <a:schemeClr val="lt1"/>
+        </a:fontRef>
+      </a:style>
+    </a:spDef>
+    <a:lnDef>
+      <a:spPr/>
+      <a:bodyPr/>
+      <a:lstStyle/>
+      <a:style>
+        <a:lnRef idx="2">
+          <a:schemeClr val="accent1"/>
+        </a:lnRef>
+        <a:fillRef idx="0">
+          <a:schemeClr val="accent1"/>
+        </a:fillRef>
+        <a:effectRef idx="1">
+          <a:schemeClr val="accent1"/>
+        </a:effectRef>
+        <a:fontRef idx="minor">
+          <a:schemeClr val="tx1"/>
+        </a:fontRef>
+      </a:style>
+    </a:lnDef>
+  </a:objectDefaults>
+  <a:extraClrSchemeLst/>
+</a:theme>
 </file>